--- a/2026/PARADIGMAS/Lab3/RPG.pptx
+++ b/2026/PARADIGMAS/Lab3/RPG.pptx
@@ -4,6 +4,9 @@
   <p:sldMasterIdLst>
     <p:sldMasterId id="2147483648" r:id="rId1"/>
   </p:sldMasterIdLst>
+  <p:notesMasterIdLst>
+    <p:notesMasterId r:id="rId8"/>
+  </p:notesMasterIdLst>
   <p:sldIdLst>
     <p:sldId id="256" r:id="rId2"/>
     <p:sldId id="257" r:id="rId3"/>
@@ -12,10 +15,7 @@
     <p:sldId id="260" r:id="rId6"/>
     <p:sldId id="261" r:id="rId7"/>
   </p:sldIdLst>
-  <p:notesMasterIdLst>
-    <p:notesMasterId r:id="rId8"/>
-  </p:notesMasterIdLst>
-  <p:sldSz cx="9144000" cy="5143500"/>
+  <p:sldSz cx="9144000" cy="5143500" type="screen16x9"/>
   <p:notesSz cx="5143500" cy="9144000"/>
   <p:defaultTextStyle>
     <a:lvl1pPr marL="0" algn="l" defTabSz="914400" rtl="0" eaLnBrk="1" latinLnBrk="0" hangingPunct="1">
@@ -109,6 +109,11 @@
       </a:defRPr>
     </a:lvl9pPr>
   </p:defaultTextStyle>
+  <p:extLst>
+    <p:ext uri="{EFAFB233-063F-42B5-8137-9DF3F51BA10A}">
+      <p15:sldGuideLst xmlns:p15="http://schemas.microsoft.com/office/powerpoint/2012/main"/>
+    </p:ext>
+  </p:extLst>
 </p:presentation>
 </file>
 
@@ -134,234 +139,10 @@
           <a:chExt cx="0" cy="0"/>
         </a:xfrm>
       </p:grpSpPr>
-      <p:sp>
-        <p:nvSpPr>
-          <p:cNvPr id="2" name="Header Placeholder 1"/>
-          <p:cNvSpPr>
-            <a:spLocks noGrp="1"/>
-          </p:cNvSpPr>
-          <p:nvPr>
-            <p:ph type="hdr" sz="quarter"/>
-          </p:nvPr>
-        </p:nvSpPr>
-        <p:spPr>
-          <a:xfrm>
-            <a:off x="0" y="0"/>
-            <a:ext cx="2971800" cy="458788"/>
-          </a:xfrm>
-          <a:prstGeom prst="rect">
-            <a:avLst/>
-          </a:prstGeom>
-        </p:spPr>
-        <p:txBody>
-          <a:bodyPr vert="horz" lIns="91440" tIns="45720" rIns="91440" bIns="45720" rtlCol="0"/>
-          <a:lstStyle>
-            <a:lvl1pPr algn="l">
-              <a:defRPr sz="1200"/>
-            </a:lvl1pPr>
-          </a:lstStyle>
-          <a:p>
-            <a:endParaRPr lang="en-US"/>
-          </a:p>
-        </p:txBody>
-      </p:sp>
-      <p:sp>
-        <p:nvSpPr>
-          <p:cNvPr id="3" name="Date Placeholder 2"/>
-          <p:cNvSpPr>
-            <a:spLocks noGrp="1"/>
-          </p:cNvSpPr>
-          <p:nvPr>
-            <p:ph type="dt" idx="1"/>
-          </p:nvPr>
-        </p:nvSpPr>
-        <p:spPr>
-          <a:xfrm>
-            <a:off x="3884613" y="0"/>
-            <a:ext cx="2971800" cy="458788"/>
-          </a:xfrm>
-          <a:prstGeom prst="rect">
-            <a:avLst/>
-          </a:prstGeom>
-        </p:spPr>
-        <p:txBody>
-          <a:bodyPr vert="horz" lIns="91440" tIns="45720" rIns="91440" bIns="45720" rtlCol="0"/>
-          <a:lstStyle>
-            <a:lvl1pPr algn="r">
-              <a:defRPr sz="1200"/>
-            </a:lvl1pPr>
-          </a:lstStyle>
-          <a:p>
-            <a:fld id="{5282F153-3F37-0F45-9E97-73ACFA13230C}" type="datetimeFigureOut">
-              <a:rPr lang="en-US"/>
-              <a:t>7/23/19</a:t>
-            </a:fld>
-            <a:endParaRPr lang="en-US"/>
-          </a:p>
-        </p:txBody>
-      </p:sp>
-      <p:sp>
-        <p:nvSpPr>
-          <p:cNvPr id="4" name="Slide Image Placeholder 3"/>
-          <p:cNvSpPr>
-            <a:spLocks noGrp="1" noRot="1" noChangeAspect="1"/>
-          </p:cNvSpPr>
-          <p:nvPr>
-            <p:ph type="sldImg" idx="2"/>
-          </p:nvPr>
-        </p:nvSpPr>
-        <p:spPr>
-          <a:xfrm>
-            <a:off x="685800" y="1143000"/>
-            <a:ext cx="5486400" cy="3086100"/>
-          </a:xfrm>
-          <a:prstGeom prst="rect">
-            <a:avLst/>
-          </a:prstGeom>
-          <a:noFill/>
-          <a:ln w="12700">
-            <a:solidFill>
-              <a:prstClr val="black"/>
-            </a:solidFill>
-          </a:ln>
-        </p:spPr>
-        <p:txBody>
-          <a:bodyPr vert="horz" lIns="91440" tIns="45720" rIns="91440" bIns="45720" rtlCol="0" anchor="ctr"/>
-          <a:lstStyle/>
-          <a:p>
-            <a:endParaRPr lang="en-US"/>
-          </a:p>
-        </p:txBody>
-      </p:sp>
-      <p:sp>
-        <p:nvSpPr>
-          <p:cNvPr id="5" name="Notes Placeholder 4"/>
-          <p:cNvSpPr>
-            <a:spLocks noGrp="1"/>
-          </p:cNvSpPr>
-          <p:nvPr>
-            <p:ph type="body" sz="quarter" idx="3"/>
-          </p:nvPr>
-        </p:nvSpPr>
-        <p:spPr>
-          <a:xfrm>
-            <a:off x="685800" y="4400550"/>
-            <a:ext cx="5486400" cy="3600450"/>
-          </a:xfrm>
-          <a:prstGeom prst="rect">
-            <a:avLst/>
-          </a:prstGeom>
-        </p:spPr>
-        <p:txBody>
-          <a:bodyPr vert="horz" lIns="91440" tIns="45720" rIns="91440" bIns="45720" rtlCol="0"/>
-          <a:lstStyle/>
-          <a:p>
-            <a:pPr lvl="0"/>
-            <a:r>
-              <a:rPr lang="en-US"/>
-              <a:t>Click to edit Master text styles</a:t>
-            </a:r>
-          </a:p>
-          <a:p>
-            <a:pPr lvl="1"/>
-            <a:r>
-              <a:rPr lang="en-US"/>
-              <a:t>Second level</a:t>
-            </a:r>
-          </a:p>
-          <a:p>
-            <a:pPr lvl="2"/>
-            <a:r>
-              <a:rPr lang="en-US"/>
-              <a:t>Third level</a:t>
-            </a:r>
-          </a:p>
-          <a:p>
-            <a:pPr lvl="3"/>
-            <a:r>
-              <a:rPr lang="en-US"/>
-              <a:t>Fourth level</a:t>
-            </a:r>
-          </a:p>
-          <a:p>
-            <a:pPr lvl="4"/>
-            <a:r>
-              <a:rPr lang="en-US"/>
-              <a:t>Fifth level</a:t>
-            </a:r>
-          </a:p>
-        </p:txBody>
-      </p:sp>
-      <p:sp>
-        <p:nvSpPr>
-          <p:cNvPr id="6" name="Footer Placeholder 5"/>
-          <p:cNvSpPr>
-            <a:spLocks noGrp="1"/>
-          </p:cNvSpPr>
-          <p:nvPr>
-            <p:ph type="ftr" sz="quarter" idx="4"/>
-          </p:nvPr>
-        </p:nvSpPr>
-        <p:spPr>
-          <a:xfrm>
-            <a:off x="0" y="8685213"/>
-            <a:ext cx="2971800" cy="458787"/>
-          </a:xfrm>
-          <a:prstGeom prst="rect">
-            <a:avLst/>
-          </a:prstGeom>
-        </p:spPr>
-        <p:txBody>
-          <a:bodyPr vert="horz" lIns="91440" tIns="45720" rIns="91440" bIns="45720" rtlCol="0" anchor="b"/>
-          <a:lstStyle>
-            <a:lvl1pPr algn="l">
-              <a:defRPr sz="1200"/>
-            </a:lvl1pPr>
-          </a:lstStyle>
-          <a:p>
-            <a:endParaRPr lang="en-US"/>
-          </a:p>
-        </p:txBody>
-      </p:sp>
-      <p:sp>
-        <p:nvSpPr>
-          <p:cNvPr id="7" name="Slide Number Placeholder 6"/>
-          <p:cNvSpPr>
-            <a:spLocks noGrp="1"/>
-          </p:cNvSpPr>
-          <p:nvPr>
-            <p:ph type="sldNum" sz="quarter" idx="5"/>
-          </p:nvPr>
-        </p:nvSpPr>
-        <p:spPr>
-          <a:xfrm>
-            <a:off x="3884613" y="8685213"/>
-            <a:ext cx="2971800" cy="458787"/>
-          </a:xfrm>
-          <a:prstGeom prst="rect">
-            <a:avLst/>
-          </a:prstGeom>
-        </p:spPr>
-        <p:txBody>
-          <a:bodyPr vert="horz" lIns="91440" tIns="45720" rIns="91440" bIns="45720" rtlCol="0" anchor="b"/>
-          <a:lstStyle>
-            <a:lvl1pPr algn="r">
-              <a:defRPr sz="1200"/>
-            </a:lvl1pPr>
-          </a:lstStyle>
-          <a:p>
-            <a:fld id="{CE5E9CC1-C706-0F49-92D6-E571CC5EEA8F}" type="slidenum">
-              <a:rPr lang="en-US"/>
-              <a:t>‹#›</a:t>
-            </a:fld>
-            <a:endParaRPr lang="en-US"/>
-          </a:p>
-        </p:txBody>
-      </p:sp>
     </p:spTree>
     <p:extLst>
       <p:ext uri="{BB962C8B-B14F-4D97-AF65-F5344CB8AC3E}">
-        <p14:creationId xmlns:p14="http://schemas.microsoft.com/office/powerpoint/2010/main" val="1024086991"/>
+        <p14:creationId xmlns:p14="http://schemas.microsoft.com/office/powerpoint/2010/main" val="597521031"/>
       </p:ext>
     </p:extLst>
   </p:cSld>
@@ -505,10 +286,6 @@
           <a:bodyPr/>
           <a:lstStyle/>
           <a:p>
-            <a:r>
-              <a:rPr lang="en-US" dirty="0"/>
-              <a:t/>
-            </a:r>
             <a:endParaRPr lang="en-US" dirty="0"/>
           </a:p>
         </p:txBody>
@@ -593,10 +370,6 @@
           <a:bodyPr/>
           <a:lstStyle/>
           <a:p>
-            <a:r>
-              <a:rPr lang="en-US" dirty="0"/>
-              <a:t/>
-            </a:r>
             <a:endParaRPr lang="en-US" dirty="0"/>
           </a:p>
         </p:txBody>
@@ -681,10 +454,6 @@
           <a:bodyPr/>
           <a:lstStyle/>
           <a:p>
-            <a:r>
-              <a:rPr lang="en-US" dirty="0"/>
-              <a:t/>
-            </a:r>
             <a:endParaRPr lang="en-US" dirty="0"/>
           </a:p>
         </p:txBody>
@@ -769,10 +538,6 @@
           <a:bodyPr/>
           <a:lstStyle/>
           <a:p>
-            <a:r>
-              <a:rPr lang="en-US" dirty="0"/>
-              <a:t/>
-            </a:r>
             <a:endParaRPr lang="en-US" dirty="0"/>
           </a:p>
         </p:txBody>
@@ -857,10 +622,6 @@
           <a:bodyPr/>
           <a:lstStyle/>
           <a:p>
-            <a:r>
-              <a:rPr lang="en-US" dirty="0"/>
-              <a:t/>
-            </a:r>
             <a:endParaRPr lang="en-US" dirty="0"/>
           </a:p>
         </p:txBody>
@@ -945,10 +706,6 @@
           <a:bodyPr/>
           <a:lstStyle/>
           <a:p>
-            <a:r>
-              <a:rPr lang="en-US" dirty="0"/>
-              <a:t/>
-            </a:r>
             <a:endParaRPr lang="en-US" dirty="0"/>
           </a:p>
         </p:txBody>
@@ -1022,6 +779,11 @@
 <file path=ppt/slideMasters/slideMaster1.xml><?xml version="1.0" encoding="utf-8"?>
 <p:sldMaster xmlns:a="http://schemas.openxmlformats.org/drawingml/2006/main" xmlns:r="http://schemas.openxmlformats.org/officeDocument/2006/relationships" xmlns:p="http://schemas.openxmlformats.org/presentationml/2006/main">
   <p:cSld>
+    <p:bg>
+      <p:bgRef idx="1001">
+        <a:schemeClr val="bg1"/>
+      </p:bgRef>
+    </p:bg>
     <p:spTree>
       <p:nvGrpSpPr>
         <p:cNvPr id="1" name=""/>
@@ -1304,6 +1066,7 @@
         <a:solidFill>
           <a:srgbClr val="0D0D1A"/>
         </a:solidFill>
+        <a:effectLst/>
       </p:bgPr>
     </p:bg>
     <p:spTree>
@@ -1344,6 +1107,13 @@
             <a:prstDash val="solid"/>
           </a:ln>
         </p:spPr>
+        <p:txBody>
+          <a:bodyPr/>
+          <a:lstStyle/>
+          <a:p>
+            <a:endParaRPr lang="pt-BR"/>
+          </a:p>
+        </p:txBody>
       </p:sp>
       <p:sp>
         <p:nvSpPr>
@@ -1369,6 +1139,13 @@
             <a:prstDash val="solid"/>
           </a:ln>
         </p:spPr>
+        <p:txBody>
+          <a:bodyPr/>
+          <a:lstStyle/>
+          <a:p>
+            <a:endParaRPr lang="pt-BR"/>
+          </a:p>
+        </p:txBody>
       </p:sp>
       <p:sp>
         <p:nvSpPr>
@@ -1396,6 +1173,13 @@
             <a:prstDash val="solid"/>
           </a:ln>
         </p:spPr>
+        <p:txBody>
+          <a:bodyPr/>
+          <a:lstStyle/>
+          <a:p>
+            <a:endParaRPr lang="pt-BR"/>
+          </a:p>
+        </p:txBody>
       </p:sp>
       <p:sp>
         <p:nvSpPr>
@@ -1423,6 +1207,13 @@
             <a:prstDash val="solid"/>
           </a:ln>
         </p:spPr>
+        <p:txBody>
+          <a:bodyPr/>
+          <a:lstStyle/>
+          <a:p>
+            <a:endParaRPr lang="pt-BR"/>
+          </a:p>
+        </p:txBody>
       </p:sp>
       <p:sp>
         <p:nvSpPr>
@@ -1448,6 +1239,13 @@
             <a:prstDash val="solid"/>
           </a:ln>
         </p:spPr>
+        <p:txBody>
+          <a:bodyPr/>
+          <a:lstStyle/>
+          <a:p>
+            <a:endParaRPr lang="pt-BR"/>
+          </a:p>
+        </p:txBody>
       </p:sp>
       <p:sp>
         <p:nvSpPr>
@@ -1470,7 +1268,7 @@
           <a:bodyPr wrap="square" lIns="0" tIns="0" rIns="0" bIns="0" rtlCol="0" anchor="ctr"/>
           <a:lstStyle/>
           <a:p>
-            <a:pPr algn="ctr" indent="0" marL="0">
+            <a:pPr marL="0" indent="0" algn="ctr">
               <a:buNone/>
             </a:pPr>
             <a:r>
@@ -1506,7 +1304,7 @@
           <a:bodyPr wrap="square" rtlCol="0" anchor="ctr"/>
           <a:lstStyle/>
           <a:p>
-            <a:pPr indent="0" marL="0">
+            <a:pPr marL="0" indent="0">
               <a:buNone/>
             </a:pPr>
             <a:r>
@@ -1545,7 +1343,7 @@
           <a:bodyPr wrap="square" rtlCol="0" anchor="ctr"/>
           <a:lstStyle/>
           <a:p>
-            <a:pPr indent="0" marL="0">
+            <a:pPr marL="0" indent="0">
               <a:buNone/>
             </a:pPr>
             <a:r>
@@ -1584,7 +1382,7 @@
           <a:bodyPr wrap="square" rtlCol="0" anchor="ctr"/>
           <a:lstStyle/>
           <a:p>
-            <a:pPr indent="0" marL="0">
+            <a:pPr marL="0" indent="0">
               <a:buNone/>
             </a:pPr>
             <a:r>
@@ -1626,6 +1424,13 @@
             <a:prstDash val="solid"/>
           </a:ln>
         </p:spPr>
+        <p:txBody>
+          <a:bodyPr/>
+          <a:lstStyle/>
+          <a:p>
+            <a:endParaRPr lang="pt-BR"/>
+          </a:p>
+        </p:txBody>
       </p:sp>
       <p:sp>
         <p:nvSpPr>
@@ -1651,6 +1456,13 @@
             <a:prstDash val="solid"/>
           </a:ln>
         </p:spPr>
+        <p:txBody>
+          <a:bodyPr/>
+          <a:lstStyle/>
+          <a:p>
+            <a:endParaRPr lang="pt-BR"/>
+          </a:p>
+        </p:txBody>
       </p:sp>
       <p:sp>
         <p:nvSpPr>
@@ -1673,7 +1485,7 @@
           <a:bodyPr wrap="square" rtlCol="0" anchor="ctr"/>
           <a:lstStyle/>
           <a:p>
-            <a:pPr algn="ctr" indent="0" marL="0">
+            <a:pPr marL="0" indent="0" algn="ctr">
               <a:buNone/>
             </a:pPr>
             <a:r>
@@ -1709,7 +1521,7 @@
           <a:bodyPr wrap="square" rtlCol="0" anchor="ctr"/>
           <a:lstStyle/>
           <a:p>
-            <a:pPr algn="ctr" indent="0" marL="0">
+            <a:pPr marL="0" indent="0" algn="ctr">
               <a:buNone/>
             </a:pPr>
             <a:r>
@@ -1748,6 +1560,13 @@
             <a:prstDash val="solid"/>
           </a:ln>
         </p:spPr>
+        <p:txBody>
+          <a:bodyPr/>
+          <a:lstStyle/>
+          <a:p>
+            <a:endParaRPr lang="pt-BR"/>
+          </a:p>
+        </p:txBody>
       </p:sp>
       <p:sp>
         <p:nvSpPr>
@@ -1770,7 +1589,7 @@
           <a:bodyPr wrap="square" rtlCol="0" anchor="ctr"/>
           <a:lstStyle/>
           <a:p>
-            <a:pPr algn="ctr" indent="0" marL="0">
+            <a:pPr marL="0" indent="0" algn="ctr">
               <a:buNone/>
             </a:pPr>
             <a:r>
@@ -1806,7 +1625,7 @@
           <a:bodyPr wrap="square" rtlCol="0" anchor="ctr"/>
           <a:lstStyle/>
           <a:p>
-            <a:pPr algn="ctr" indent="0" marL="0">
+            <a:pPr marL="0" indent="0" algn="ctr">
               <a:buNone/>
             </a:pPr>
             <a:r>
@@ -1845,6 +1664,13 @@
             <a:prstDash val="solid"/>
           </a:ln>
         </p:spPr>
+        <p:txBody>
+          <a:bodyPr/>
+          <a:lstStyle/>
+          <a:p>
+            <a:endParaRPr lang="pt-BR"/>
+          </a:p>
+        </p:txBody>
       </p:sp>
       <p:sp>
         <p:nvSpPr>
@@ -1867,7 +1693,7 @@
           <a:bodyPr wrap="square" rtlCol="0" anchor="ctr"/>
           <a:lstStyle/>
           <a:p>
-            <a:pPr algn="ctr" indent="0" marL="0">
+            <a:pPr marL="0" indent="0" algn="ctr">
               <a:buNone/>
             </a:pPr>
             <a:r>
@@ -1903,7 +1729,7 @@
           <a:bodyPr wrap="square" rtlCol="0" anchor="ctr"/>
           <a:lstStyle/>
           <a:p>
-            <a:pPr algn="ctr" indent="0" marL="0">
+            <a:pPr marL="0" indent="0" algn="ctr">
               <a:buNone/>
             </a:pPr>
             <a:r>
@@ -1939,7 +1765,7 @@
           <a:bodyPr wrap="square" rtlCol="0" anchor="ctr"/>
           <a:lstStyle/>
           <a:p>
-            <a:pPr algn="ctr" indent="0" marL="0">
+            <a:pPr marL="0" indent="0" algn="ctr">
               <a:buNone/>
             </a:pPr>
             <a:r>
@@ -1978,6 +1804,13 @@
             <a:prstDash val="solid"/>
           </a:ln>
         </p:spPr>
+        <p:txBody>
+          <a:bodyPr/>
+          <a:lstStyle/>
+          <a:p>
+            <a:endParaRPr lang="pt-BR"/>
+          </a:p>
+        </p:txBody>
       </p:sp>
       <p:sp>
         <p:nvSpPr>
@@ -2000,7 +1833,7 @@
           <a:bodyPr wrap="square" rtlCol="0" anchor="ctr"/>
           <a:lstStyle/>
           <a:p>
-            <a:pPr algn="ctr" indent="0" marL="0">
+            <a:pPr marL="0" indent="0" algn="ctr">
               <a:buNone/>
             </a:pPr>
             <a:r>
@@ -2031,6 +1864,7 @@
         <a:solidFill>
           <a:srgbClr val="0D0D1A"/>
         </a:solidFill>
+        <a:effectLst/>
       </p:bgPr>
     </p:bg>
     <p:spTree>
@@ -2071,6 +1905,13 @@
             <a:prstDash val="solid"/>
           </a:ln>
         </p:spPr>
+        <p:txBody>
+          <a:bodyPr/>
+          <a:lstStyle/>
+          <a:p>
+            <a:endParaRPr lang="pt-BR"/>
+          </a:p>
+        </p:txBody>
       </p:sp>
       <p:sp>
         <p:nvSpPr>
@@ -2096,6 +1937,13 @@
             <a:prstDash val="solid"/>
           </a:ln>
         </p:spPr>
+        <p:txBody>
+          <a:bodyPr/>
+          <a:lstStyle/>
+          <a:p>
+            <a:endParaRPr lang="pt-BR"/>
+          </a:p>
+        </p:txBody>
       </p:sp>
       <p:sp>
         <p:nvSpPr>
@@ -2118,11 +1966,11 @@
           <a:bodyPr wrap="square" rtlCol="0" anchor="ctr"/>
           <a:lstStyle/>
           <a:p>
-            <a:pPr indent="0" marL="0">
-              <a:buNone/>
-            </a:pPr>
-            <a:r>
-              <a:rPr lang="en-US" sz="1100" b="1" spc="300" kern="0" dirty="0">
+            <a:pPr marL="0" indent="0">
+              <a:buNone/>
+            </a:pPr>
+            <a:r>
+              <a:rPr lang="en-US" sz="1100" b="1" kern="0" spc="300" dirty="0">
                 <a:solidFill>
                   <a:srgbClr val="E94560"/>
                 </a:solidFill>
@@ -2157,7 +2005,7 @@
           <a:bodyPr wrap="square" rtlCol="0" anchor="ctr"/>
           <a:lstStyle/>
           <a:p>
-            <a:pPr indent="0" marL="0">
+            <a:pPr marL="0" indent="0">
               <a:buNone/>
             </a:pPr>
             <a:r>
@@ -2199,6 +2047,13 @@
             <a:prstDash val="solid"/>
           </a:ln>
         </p:spPr>
+        <p:txBody>
+          <a:bodyPr/>
+          <a:lstStyle/>
+          <a:p>
+            <a:endParaRPr lang="pt-BR"/>
+          </a:p>
+        </p:txBody>
       </p:sp>
       <p:sp>
         <p:nvSpPr>
@@ -2224,6 +2079,13 @@
             <a:prstDash val="solid"/>
           </a:ln>
         </p:spPr>
+        <p:txBody>
+          <a:bodyPr/>
+          <a:lstStyle/>
+          <a:p>
+            <a:endParaRPr lang="pt-BR"/>
+          </a:p>
+        </p:txBody>
       </p:sp>
       <p:sp>
         <p:nvSpPr>
@@ -2246,7 +2108,7 @@
           <a:bodyPr wrap="square" rtlCol="0" anchor="ctr"/>
           <a:lstStyle/>
           <a:p>
-            <a:pPr indent="0" marL="0">
+            <a:pPr marL="0" indent="0">
               <a:buNone/>
             </a:pPr>
             <a:r>
@@ -2285,7 +2147,7 @@
           <a:bodyPr wrap="square" rtlCol="0" anchor="ctr"/>
           <a:lstStyle/>
           <a:p>
-            <a:pPr indent="0" marL="0">
+            <a:pPr marL="0" indent="0">
               <a:buNone/>
             </a:pPr>
             <a:r>
@@ -2299,9 +2161,6 @@
               </a:rPr>
               <a:t>hp</a:t>
             </a:r>
-            <a:pPr indent="0" marL="0">
-              <a:buNone/>
-            </a:pPr>
             <a:r>
               <a:rPr lang="en-US" sz="1000" dirty="0">
                 <a:solidFill>
@@ -2311,11 +2170,8 @@
                 <a:ea typeface="Consolas" pitchFamily="34" charset="-122"/>
                 <a:cs typeface="Consolas" pitchFamily="34" charset="-120"/>
               </a:rPr>
-              <a:t xml:space="preserve"> = </a:t>
-            </a:r>
-            <a:pPr indent="0" marL="0">
-              <a:buNone/>
-            </a:pPr>
+              <a:t> = </a:t>
+            </a:r>
             <a:r>
               <a:rPr lang="en-US" sz="1000" dirty="0">
                 <a:solidFill>
@@ -2327,9 +2183,6 @@
               </a:rPr>
               <a:t>100</a:t>
             </a:r>
-            <a:pPr indent="0" marL="0">
-              <a:buNone/>
-            </a:pPr>
             <a:r>
               <a:rPr lang="en-US" sz="1000" dirty="0">
                 <a:solidFill>
@@ -2339,7 +2192,7 @@
                 <a:ea typeface="Consolas" pitchFamily="34" charset="-122"/>
                 <a:cs typeface="Consolas" pitchFamily="34" charset="-120"/>
               </a:rPr>
-              <a:t xml:space="preserve">  # variavel solta</a:t>
+              <a:t>  # variavel solta</a:t>
             </a:r>
             <a:endParaRPr lang="en-US" sz="1000" dirty="0"/>
           </a:p>
@@ -2366,7 +2219,7 @@
           <a:bodyPr wrap="square" rtlCol="0" anchor="ctr"/>
           <a:lstStyle/>
           <a:p>
-            <a:pPr indent="0" marL="0">
+            <a:pPr marL="0" indent="0">
               <a:buNone/>
             </a:pPr>
             <a:r>
@@ -2380,9 +2233,6 @@
               </a:rPr>
               <a:t>hp</a:t>
             </a:r>
-            <a:pPr indent="0" marL="0">
-              <a:buNone/>
-            </a:pPr>
             <a:r>
               <a:rPr lang="en-US" sz="1000" dirty="0">
                 <a:solidFill>
@@ -2392,11 +2242,8 @@
                 <a:ea typeface="Consolas" pitchFamily="34" charset="-122"/>
                 <a:cs typeface="Consolas" pitchFamily="34" charset="-120"/>
               </a:rPr>
-              <a:t xml:space="preserve"> = </a:t>
-            </a:r>
-            <a:pPr indent="0" marL="0">
-              <a:buNone/>
-            </a:pPr>
+              <a:t> = </a:t>
+            </a:r>
             <a:r>
               <a:rPr lang="en-US" sz="1000" dirty="0">
                 <a:solidFill>
@@ -2408,9 +2255,6 @@
               </a:rPr>
               <a:t>hp</a:t>
             </a:r>
-            <a:pPr indent="0" marL="0">
-              <a:buNone/>
-            </a:pPr>
             <a:r>
               <a:rPr lang="en-US" sz="1000" dirty="0">
                 <a:solidFill>
@@ -2420,11 +2264,8 @@
                 <a:ea typeface="Consolas" pitchFamily="34" charset="-122"/>
                 <a:cs typeface="Consolas" pitchFamily="34" charset="-120"/>
               </a:rPr>
-              <a:t xml:space="preserve"> - </a:t>
-            </a:r>
-            <a:pPr indent="0" marL="0">
-              <a:buNone/>
-            </a:pPr>
+              <a:t> - </a:t>
+            </a:r>
             <a:r>
               <a:rPr lang="en-US" sz="1000" dirty="0">
                 <a:solidFill>
@@ -2436,9 +2277,6 @@
               </a:rPr>
               <a:t>9999</a:t>
             </a:r>
-            <a:pPr indent="0" marL="0">
-              <a:buNone/>
-            </a:pPr>
             <a:r>
               <a:rPr lang="en-US" sz="1000" dirty="0">
                 <a:solidFill>
@@ -2448,7 +2286,7 @@
                 <a:ea typeface="Consolas" pitchFamily="34" charset="-122"/>
                 <a:cs typeface="Consolas" pitchFamily="34" charset="-120"/>
               </a:rPr>
-              <a:t xml:space="preserve">  # dano absurdo</a:t>
+              <a:t>  # dano absurdo</a:t>
             </a:r>
             <a:endParaRPr lang="en-US" sz="1000" dirty="0"/>
           </a:p>
@@ -2475,7 +2313,7 @@
           <a:bodyPr wrap="square" rtlCol="0" anchor="ctr"/>
           <a:lstStyle/>
           <a:p>
-            <a:pPr indent="0" marL="0">
+            <a:pPr marL="0" indent="0">
               <a:buNone/>
             </a:pPr>
             <a:r>
@@ -2489,9 +2327,6 @@
               </a:rPr>
               <a:t>print</a:t>
             </a:r>
-            <a:pPr indent="0" marL="0">
-              <a:buNone/>
-            </a:pPr>
             <a:r>
               <a:rPr lang="en-US" sz="1000" dirty="0">
                 <a:solidFill>
@@ -2501,11 +2336,8 @@
                 <a:ea typeface="Consolas" pitchFamily="34" charset="-122"/>
                 <a:cs typeface="Consolas" pitchFamily="34" charset="-120"/>
               </a:rPr>
-              <a:t xml:space="preserve">(hp)  # resultado: </a:t>
-            </a:r>
-            <a:pPr indent="0" marL="0">
-              <a:buNone/>
-            </a:pPr>
+              <a:t>(hp)  # resultado: </a:t>
+            </a:r>
             <a:r>
               <a:rPr lang="en-US" sz="1000" dirty="0">
                 <a:solidFill>
@@ -2517,9 +2349,6 @@
               </a:rPr>
               <a:t>-9899</a:t>
             </a:r>
-            <a:pPr indent="0" marL="0">
-              <a:buNone/>
-            </a:pPr>
             <a:r>
               <a:rPr lang="en-US" sz="1000" dirty="0">
                 <a:solidFill>
@@ -2529,7 +2358,7 @@
                 <a:ea typeface="Consolas" pitchFamily="34" charset="-122"/>
                 <a:cs typeface="Consolas" pitchFamily="34" charset="-120"/>
               </a:rPr>
-              <a:t xml:space="preserve"> 🧟</a:t>
+              <a:t> 🧟</a:t>
             </a:r>
             <a:endParaRPr lang="en-US" sz="1000" dirty="0"/>
           </a:p>
@@ -2556,7 +2385,7 @@
           <a:bodyPr wrap="square" rtlCol="0" anchor="ctr"/>
           <a:lstStyle/>
           <a:p>
-            <a:pPr algn="ctr" indent="0" marL="0">
+            <a:pPr marL="0" indent="0" algn="ctr">
               <a:buNone/>
             </a:pPr>
             <a:r>
@@ -2595,6 +2424,13 @@
             <a:prstDash val="solid"/>
           </a:ln>
         </p:spPr>
+        <p:txBody>
+          <a:bodyPr/>
+          <a:lstStyle/>
+          <a:p>
+            <a:endParaRPr lang="pt-BR"/>
+          </a:p>
+        </p:txBody>
       </p:sp>
       <p:sp>
         <p:nvSpPr>
@@ -2620,6 +2456,13 @@
             <a:prstDash val="solid"/>
           </a:ln>
         </p:spPr>
+        <p:txBody>
+          <a:bodyPr/>
+          <a:lstStyle/>
+          <a:p>
+            <a:endParaRPr lang="pt-BR"/>
+          </a:p>
+        </p:txBody>
       </p:sp>
       <p:sp>
         <p:nvSpPr>
@@ -2642,7 +2485,7 @@
           <a:bodyPr wrap="square" rtlCol="0" anchor="ctr"/>
           <a:lstStyle/>
           <a:p>
-            <a:pPr indent="0" marL="0">
+            <a:pPr marL="0" indent="0">
               <a:buNone/>
             </a:pPr>
             <a:r>
@@ -2681,7 +2524,7 @@
           <a:bodyPr wrap="square" rtlCol="0" anchor="ctr"/>
           <a:lstStyle/>
           <a:p>
-            <a:pPr indent="0" marL="0">
+            <a:pPr marL="0" indent="0">
               <a:buNone/>
             </a:pPr>
             <a:r>
@@ -2723,6 +2566,13 @@
             <a:prstDash val="solid"/>
           </a:ln>
         </p:spPr>
+        <p:txBody>
+          <a:bodyPr/>
+          <a:lstStyle/>
+          <a:p>
+            <a:endParaRPr lang="pt-BR"/>
+          </a:p>
+        </p:txBody>
       </p:sp>
       <p:sp>
         <p:nvSpPr>
@@ -2748,6 +2598,13 @@
             <a:prstDash val="solid"/>
           </a:ln>
         </p:spPr>
+        <p:txBody>
+          <a:bodyPr/>
+          <a:lstStyle/>
+          <a:p>
+            <a:endParaRPr lang="pt-BR"/>
+          </a:p>
+        </p:txBody>
       </p:sp>
       <p:sp>
         <p:nvSpPr>
@@ -2770,7 +2627,7 @@
           <a:bodyPr wrap="square" rtlCol="0" anchor="ctr"/>
           <a:lstStyle/>
           <a:p>
-            <a:pPr indent="0" marL="0">
+            <a:pPr marL="0" indent="0">
               <a:buNone/>
             </a:pPr>
             <a:r>
@@ -2809,7 +2666,7 @@
           <a:bodyPr wrap="square" rtlCol="0" anchor="ctr"/>
           <a:lstStyle/>
           <a:p>
-            <a:pPr indent="0" marL="0">
+            <a:pPr marL="0" indent="0">
               <a:buNone/>
             </a:pPr>
             <a:r>
@@ -2851,6 +2708,13 @@
             <a:prstDash val="solid"/>
           </a:ln>
         </p:spPr>
+        <p:txBody>
+          <a:bodyPr/>
+          <a:lstStyle/>
+          <a:p>
+            <a:endParaRPr lang="pt-BR"/>
+          </a:p>
+        </p:txBody>
       </p:sp>
       <p:sp>
         <p:nvSpPr>
@@ -2876,6 +2740,13 @@
             <a:prstDash val="solid"/>
           </a:ln>
         </p:spPr>
+        <p:txBody>
+          <a:bodyPr/>
+          <a:lstStyle/>
+          <a:p>
+            <a:endParaRPr lang="pt-BR"/>
+          </a:p>
+        </p:txBody>
       </p:sp>
       <p:sp>
         <p:nvSpPr>
@@ -2898,7 +2769,7 @@
           <a:bodyPr wrap="square" rtlCol="0" anchor="ctr"/>
           <a:lstStyle/>
           <a:p>
-            <a:pPr indent="0" marL="0">
+            <a:pPr marL="0" indent="0">
               <a:buNone/>
             </a:pPr>
             <a:r>
@@ -2937,7 +2808,7 @@
           <a:bodyPr wrap="square" rtlCol="0" anchor="ctr"/>
           <a:lstStyle/>
           <a:p>
-            <a:pPr indent="0" marL="0">
+            <a:pPr marL="0" indent="0">
               <a:buNone/>
             </a:pPr>
             <a:r>
@@ -2979,6 +2850,13 @@
             <a:prstDash val="solid"/>
           </a:ln>
         </p:spPr>
+        <p:txBody>
+          <a:bodyPr/>
+          <a:lstStyle/>
+          <a:p>
+            <a:endParaRPr lang="pt-BR"/>
+          </a:p>
+        </p:txBody>
       </p:sp>
       <p:sp>
         <p:nvSpPr>
@@ -3001,7 +2879,7 @@
           <a:bodyPr wrap="square" rtlCol="0" anchor="ctr"/>
           <a:lstStyle/>
           <a:p>
-            <a:pPr algn="ctr" indent="0" marL="0">
+            <a:pPr marL="0" indent="0" algn="ctr">
               <a:buNone/>
             </a:pPr>
             <a:r>
@@ -3032,6 +2910,7 @@
         <a:solidFill>
           <a:srgbClr val="0D0D1A"/>
         </a:solidFill>
+        <a:effectLst/>
       </p:bgPr>
     </p:bg>
     <p:spTree>
@@ -3072,6 +2951,13 @@
             <a:prstDash val="solid"/>
           </a:ln>
         </p:spPr>
+        <p:txBody>
+          <a:bodyPr/>
+          <a:lstStyle/>
+          <a:p>
+            <a:endParaRPr lang="pt-BR"/>
+          </a:p>
+        </p:txBody>
       </p:sp>
       <p:sp>
         <p:nvSpPr>
@@ -3097,6 +2983,13 @@
             <a:prstDash val="solid"/>
           </a:ln>
         </p:spPr>
+        <p:txBody>
+          <a:bodyPr/>
+          <a:lstStyle/>
+          <a:p>
+            <a:endParaRPr lang="pt-BR"/>
+          </a:p>
+        </p:txBody>
       </p:sp>
       <p:sp>
         <p:nvSpPr>
@@ -3119,11 +3012,11 @@
           <a:bodyPr wrap="square" rtlCol="0" anchor="ctr"/>
           <a:lstStyle/>
           <a:p>
-            <a:pPr indent="0" marL="0">
-              <a:buNone/>
-            </a:pPr>
-            <a:r>
-              <a:rPr lang="en-US" sz="1100" b="1" spc="300" kern="0" dirty="0">
+            <a:pPr marL="0" indent="0">
+              <a:buNone/>
+            </a:pPr>
+            <a:r>
+              <a:rPr lang="en-US" sz="1100" b="1" kern="0" spc="300" dirty="0">
                 <a:solidFill>
                   <a:srgbClr val="00C896"/>
                 </a:solidFill>
@@ -3158,7 +3051,7 @@
           <a:bodyPr wrap="square" rtlCol="0" anchor="ctr"/>
           <a:lstStyle/>
           <a:p>
-            <a:pPr indent="0" marL="0">
+            <a:pPr marL="0" indent="0">
               <a:buNone/>
             </a:pPr>
             <a:r>
@@ -3200,6 +3093,13 @@
             <a:prstDash val="solid"/>
           </a:ln>
         </p:spPr>
+        <p:txBody>
+          <a:bodyPr/>
+          <a:lstStyle/>
+          <a:p>
+            <a:endParaRPr lang="pt-BR"/>
+          </a:p>
+        </p:txBody>
       </p:sp>
       <p:sp>
         <p:nvSpPr>
@@ -3225,6 +3125,13 @@
             <a:prstDash val="solid"/>
           </a:ln>
         </p:spPr>
+        <p:txBody>
+          <a:bodyPr/>
+          <a:lstStyle/>
+          <a:p>
+            <a:endParaRPr lang="pt-BR"/>
+          </a:p>
+        </p:txBody>
       </p:sp>
       <p:sp>
         <p:nvSpPr>
@@ -3247,7 +3154,7 @@
           <a:bodyPr wrap="square" rtlCol="0" anchor="ctr"/>
           <a:lstStyle/>
           <a:p>
-            <a:pPr indent="0" marL="0">
+            <a:pPr marL="0" indent="0">
               <a:buNone/>
             </a:pPr>
             <a:r>
@@ -3259,11 +3166,8 @@
                 <a:ea typeface="Consolas" pitchFamily="34" charset="-122"/>
                 <a:cs typeface="Consolas" pitchFamily="34" charset="-120"/>
               </a:rPr>
-              <a:t xml:space="preserve">class </a:t>
-            </a:r>
-            <a:pPr indent="0" marL="0">
-              <a:buNone/>
-            </a:pPr>
+              <a:t>class </a:t>
+            </a:r>
             <a:r>
               <a:rPr lang="en-US" sz="920" dirty="0">
                 <a:solidFill>
@@ -3275,9 +3179,6 @@
               </a:rPr>
               <a:t>Personagem</a:t>
             </a:r>
-            <a:pPr indent="0" marL="0">
-              <a:buNone/>
-            </a:pPr>
             <a:r>
               <a:rPr lang="en-US" sz="920" dirty="0">
                 <a:solidFill>
@@ -3314,7 +3215,7 @@
           <a:bodyPr wrap="square" rtlCol="0" anchor="ctr"/>
           <a:lstStyle/>
           <a:p>
-            <a:pPr indent="0" marL="0">
+            <a:pPr marL="0" indent="0">
               <a:buNone/>
             </a:pPr>
             <a:r>
@@ -3326,11 +3227,8 @@
                 <a:ea typeface="Consolas" pitchFamily="34" charset="-122"/>
                 <a:cs typeface="Consolas" pitchFamily="34" charset="-120"/>
               </a:rPr>
-              <a:t xml:space="preserve">  def </a:t>
-            </a:r>
-            <a:pPr indent="0" marL="0">
-              <a:buNone/>
-            </a:pPr>
+              <a:t>  def </a:t>
+            </a:r>
             <a:r>
               <a:rPr lang="en-US" sz="920" dirty="0">
                 <a:solidFill>
@@ -3342,9 +3240,6 @@
               </a:rPr>
               <a:t>__init__</a:t>
             </a:r>
-            <a:pPr indent="0" marL="0">
-              <a:buNone/>
-            </a:pPr>
             <a:r>
               <a:rPr lang="en-US" sz="920" dirty="0">
                 <a:solidFill>
@@ -3381,7 +3276,7 @@
           <a:bodyPr wrap="square" rtlCol="0" anchor="ctr"/>
           <a:lstStyle/>
           <a:p>
-            <a:pPr indent="0" marL="0">
+            <a:pPr marL="0" indent="0">
               <a:buNone/>
             </a:pPr>
             <a:r>
@@ -3393,11 +3288,8 @@
                 <a:ea typeface="Consolas" pitchFamily="34" charset="-122"/>
                 <a:cs typeface="Consolas" pitchFamily="34" charset="-120"/>
               </a:rPr>
-              <a:t xml:space="preserve">    if </a:t>
-            </a:r>
-            <a:pPr indent="0" marL="0">
-              <a:buNone/>
-            </a:pPr>
+              <a:t>    if </a:t>
+            </a:r>
             <a:r>
               <a:rPr lang="en-US" sz="920" dirty="0">
                 <a:solidFill>
@@ -3407,11 +3299,8 @@
                 <a:ea typeface="Consolas" pitchFamily="34" charset="-122"/>
                 <a:cs typeface="Consolas" pitchFamily="34" charset="-120"/>
               </a:rPr>
-              <a:t xml:space="preserve">hp_inicial </a:t>
-            </a:r>
-            <a:pPr indent="0" marL="0">
-              <a:buNone/>
-            </a:pPr>
+              <a:t>hp_inicial </a:t>
+            </a:r>
             <a:r>
               <a:rPr lang="en-US" sz="920" dirty="0">
                 <a:solidFill>
@@ -3421,11 +3310,8 @@
                 <a:ea typeface="Consolas" pitchFamily="34" charset="-122"/>
                 <a:cs typeface="Consolas" pitchFamily="34" charset="-120"/>
               </a:rPr>
-              <a:t xml:space="preserve">&lt;= </a:t>
-            </a:r>
-            <a:pPr indent="0" marL="0">
-              <a:buNone/>
-            </a:pPr>
+              <a:t>&lt;= </a:t>
+            </a:r>
             <a:r>
               <a:rPr lang="en-US" sz="920" dirty="0">
                 <a:solidFill>
@@ -3437,9 +3323,6 @@
               </a:rPr>
               <a:t>0</a:t>
             </a:r>
-            <a:pPr indent="0" marL="0">
-              <a:buNone/>
-            </a:pPr>
             <a:r>
               <a:rPr lang="en-US" sz="920" dirty="0">
                 <a:solidFill>
@@ -3476,7 +3359,7 @@
           <a:bodyPr wrap="square" rtlCol="0" anchor="ctr"/>
           <a:lstStyle/>
           <a:p>
-            <a:pPr indent="0" marL="0">
+            <a:pPr marL="0" indent="0">
               <a:buNone/>
             </a:pPr>
             <a:r>
@@ -3488,11 +3371,8 @@
                 <a:ea typeface="Consolas" pitchFamily="34" charset="-122"/>
                 <a:cs typeface="Consolas" pitchFamily="34" charset="-120"/>
               </a:rPr>
-              <a:t xml:space="preserve">      raise </a:t>
-            </a:r>
-            <a:pPr indent="0" marL="0">
-              <a:buNone/>
-            </a:pPr>
+              <a:t>      raise </a:t>
+            </a:r>
             <a:r>
               <a:rPr lang="en-US" sz="920" dirty="0">
                 <a:solidFill>
@@ -3504,9 +3384,6 @@
               </a:rPr>
               <a:t>ValueError</a:t>
             </a:r>
-            <a:pPr indent="0" marL="0">
-              <a:buNone/>
-            </a:pPr>
             <a:r>
               <a:rPr lang="en-US" sz="920" dirty="0">
                 <a:solidFill>
@@ -3543,7 +3420,7 @@
           <a:bodyPr wrap="square" rtlCol="0" anchor="ctr"/>
           <a:lstStyle/>
           <a:p>
-            <a:pPr indent="0" marL="0">
+            <a:pPr marL="0" indent="0">
               <a:buNone/>
             </a:pPr>
             <a:r>
@@ -3555,11 +3432,8 @@
                 <a:ea typeface="Consolas" pitchFamily="34" charset="-122"/>
                 <a:cs typeface="Consolas" pitchFamily="34" charset="-120"/>
               </a:rPr>
-              <a:t xml:space="preserve">    self</a:t>
-            </a:r>
-            <a:pPr indent="0" marL="0">
-              <a:buNone/>
-            </a:pPr>
+              <a:t>    self</a:t>
+            </a:r>
             <a:r>
               <a:rPr lang="en-US" sz="920" dirty="0">
                 <a:solidFill>
@@ -3569,23 +3443,45 @@
                 <a:ea typeface="Consolas" pitchFamily="34" charset="-122"/>
                 <a:cs typeface="Consolas" pitchFamily="34" charset="-120"/>
               </a:rPr>
-              <a:t xml:space="preserve">.__nome </a:t>
-            </a:r>
-            <a:pPr indent="0" marL="0">
-              <a:buNone/>
-            </a:pPr>
+              <a:t>.__nome = </a:t>
+            </a:r>
             <a:r>
               <a:rPr lang="en-US" sz="920" dirty="0">
                 <a:solidFill>
-                  <a:srgbClr val="FFFFFF"/>
+                  <a:srgbClr val="9CDCFE"/>
                 </a:solidFill>
                 <a:latin typeface="Consolas" pitchFamily="34" charset="0"/>
                 <a:ea typeface="Consolas" pitchFamily="34" charset="-122"/>
                 <a:cs typeface="Consolas" pitchFamily="34" charset="-120"/>
               </a:rPr>
-              <a:t xml:space="preserve">= </a:t>
-            </a:r>
-            <a:pPr indent="0" marL="0">
+              <a:t>nome</a:t>
+            </a:r>
+            <a:endParaRPr lang="en-US" sz="920" dirty="0"/>
+          </a:p>
+        </p:txBody>
+      </p:sp>
+      <p:sp>
+        <p:nvSpPr>
+          <p:cNvPr id="13" name="Text 11"/>
+          <p:cNvSpPr/>
+          <p:nvPr/>
+        </p:nvSpPr>
+        <p:spPr>
+          <a:xfrm>
+            <a:off x="685800" y="2400300"/>
+            <a:ext cx="4937760" cy="242316"/>
+          </a:xfrm>
+          <a:prstGeom prst="rect">
+            <a:avLst/>
+          </a:prstGeom>
+          <a:noFill/>
+          <a:ln/>
+        </p:spPr>
+        <p:txBody>
+          <a:bodyPr wrap="square" rtlCol="0" anchor="ctr"/>
+          <a:lstStyle/>
+          <a:p>
+            <a:pPr marL="0" indent="0">
               <a:buNone/>
             </a:pPr>
             <a:r>
@@ -3597,254 +3493,202 @@
                 <a:ea typeface="Consolas" pitchFamily="34" charset="-122"/>
                 <a:cs typeface="Consolas" pitchFamily="34" charset="-120"/>
               </a:rPr>
-              <a:t>nome</a:t>
-            </a:r>
-            <a:endParaRPr lang="en-US" sz="920" dirty="0"/>
-          </a:p>
-        </p:txBody>
-      </p:sp>
-      <p:sp>
-        <p:nvSpPr>
-          <p:cNvPr id="13" name="Text 11"/>
-          <p:cNvSpPr/>
-          <p:nvPr/>
-        </p:nvSpPr>
-        <p:spPr>
-          <a:xfrm>
-            <a:off x="685800" y="2400300"/>
-            <a:ext cx="4937760" cy="242316"/>
-          </a:xfrm>
-          <a:prstGeom prst="rect">
-            <a:avLst/>
-          </a:prstGeom>
-          <a:noFill/>
-          <a:ln/>
-        </p:spPr>
-        <p:txBody>
-          <a:bodyPr wrap="square" rtlCol="0" anchor="ctr"/>
-          <a:lstStyle/>
-          <a:p>
-            <a:pPr indent="0" marL="0">
-              <a:buNone/>
-            </a:pPr>
+              <a:t>    self</a:t>
+            </a:r>
             <a:r>
               <a:rPr lang="en-US" sz="920" dirty="0">
                 <a:solidFill>
-                  <a:srgbClr val="9CDCFE"/>
+                  <a:srgbClr val="FFFFFF"/>
                 </a:solidFill>
                 <a:latin typeface="Consolas" pitchFamily="34" charset="0"/>
                 <a:ea typeface="Consolas" pitchFamily="34" charset="-122"/>
                 <a:cs typeface="Consolas" pitchFamily="34" charset="-120"/>
               </a:rPr>
-              <a:t xml:space="preserve">    self</a:t>
-            </a:r>
-            <a:pPr indent="0" marL="0">
-              <a:buNone/>
-            </a:pPr>
+              <a:t>.__hp = </a:t>
+            </a:r>
             <a:r>
               <a:rPr lang="en-US" sz="920" dirty="0">
                 <a:solidFill>
-                  <a:srgbClr val="FFFFFF"/>
+                  <a:srgbClr val="9CDCFE"/>
                 </a:solidFill>
                 <a:latin typeface="Consolas" pitchFamily="34" charset="0"/>
                 <a:ea typeface="Consolas" pitchFamily="34" charset="-122"/>
                 <a:cs typeface="Consolas" pitchFamily="34" charset="-120"/>
               </a:rPr>
-              <a:t xml:space="preserve">.__hp </a:t>
-            </a:r>
-            <a:pPr indent="0" marL="0">
-              <a:buNone/>
-            </a:pPr>
+              <a:t>hp_inicial</a:t>
+            </a:r>
             <a:r>
               <a:rPr lang="en-US" sz="920" dirty="0">
                 <a:solidFill>
-                  <a:srgbClr val="FFFFFF"/>
+                  <a:srgbClr val="6A9955"/>
                 </a:solidFill>
                 <a:latin typeface="Consolas" pitchFamily="34" charset="0"/>
                 <a:ea typeface="Consolas" pitchFamily="34" charset="-122"/>
                 <a:cs typeface="Consolas" pitchFamily="34" charset="-120"/>
               </a:rPr>
-              <a:t xml:space="preserve">= </a:t>
-            </a:r>
-            <a:pPr indent="0" marL="0">
+              <a:t>  # privado</a:t>
+            </a:r>
+            <a:endParaRPr lang="en-US" sz="920" dirty="0"/>
+          </a:p>
+        </p:txBody>
+      </p:sp>
+      <p:sp>
+        <p:nvSpPr>
+          <p:cNvPr id="14" name="Text 12"/>
+          <p:cNvSpPr/>
+          <p:nvPr/>
+        </p:nvSpPr>
+        <p:spPr>
+          <a:xfrm>
+            <a:off x="685800" y="2642616"/>
+            <a:ext cx="4937760" cy="242316"/>
+          </a:xfrm>
+          <a:prstGeom prst="rect">
+            <a:avLst/>
+          </a:prstGeom>
+          <a:noFill/>
+          <a:ln/>
+        </p:spPr>
+        <p:txBody>
+          <a:bodyPr wrap="square" rtlCol="0" anchor="ctr"/>
+          <a:lstStyle/>
+          <a:p>
+            <a:pPr marL="0" indent="0">
+              <a:buNone/>
+            </a:pPr>
+            <a:endParaRPr lang="en-US" sz="920" dirty="0"/>
+          </a:p>
+        </p:txBody>
+      </p:sp>
+      <p:sp>
+        <p:nvSpPr>
+          <p:cNvPr id="15" name="Text 13"/>
+          <p:cNvSpPr/>
+          <p:nvPr/>
+        </p:nvSpPr>
+        <p:spPr>
+          <a:xfrm>
+            <a:off x="685800" y="2884932"/>
+            <a:ext cx="4937760" cy="242316"/>
+          </a:xfrm>
+          <a:prstGeom prst="rect">
+            <a:avLst/>
+          </a:prstGeom>
+          <a:noFill/>
+          <a:ln/>
+        </p:spPr>
+        <p:txBody>
+          <a:bodyPr wrap="square" rtlCol="0" anchor="ctr"/>
+          <a:lstStyle/>
+          <a:p>
+            <a:pPr marL="0" indent="0">
               <a:buNone/>
             </a:pPr>
             <a:r>
               <a:rPr lang="en-US" sz="920" dirty="0">
                 <a:solidFill>
-                  <a:srgbClr val="9CDCFE"/>
+                  <a:srgbClr val="C586C0"/>
                 </a:solidFill>
                 <a:latin typeface="Consolas" pitchFamily="34" charset="0"/>
                 <a:ea typeface="Consolas" pitchFamily="34" charset="-122"/>
                 <a:cs typeface="Consolas" pitchFamily="34" charset="-120"/>
               </a:rPr>
-              <a:t>hp_inicial</a:t>
-            </a:r>
-            <a:pPr indent="0" marL="0">
-              <a:buNone/>
-            </a:pPr>
+              <a:t>  def </a:t>
+            </a:r>
             <a:r>
               <a:rPr lang="en-US" sz="920" dirty="0">
                 <a:solidFill>
-                  <a:srgbClr val="6A9955"/>
+                  <a:srgbClr val="DCDCAA"/>
                 </a:solidFill>
                 <a:latin typeface="Consolas" pitchFamily="34" charset="0"/>
                 <a:ea typeface="Consolas" pitchFamily="34" charset="-122"/>
                 <a:cs typeface="Consolas" pitchFamily="34" charset="-120"/>
               </a:rPr>
-              <a:t xml:space="preserve">  # privado</a:t>
-            </a:r>
-            <a:endParaRPr lang="en-US" sz="920" dirty="0"/>
-          </a:p>
-        </p:txBody>
-      </p:sp>
-      <p:sp>
-        <p:nvSpPr>
-          <p:cNvPr id="14" name="Text 12"/>
-          <p:cNvSpPr/>
-          <p:nvPr/>
-        </p:nvSpPr>
-        <p:spPr>
-          <a:xfrm>
-            <a:off x="685800" y="2642616"/>
-            <a:ext cx="4937760" cy="242316"/>
-          </a:xfrm>
-          <a:prstGeom prst="rect">
-            <a:avLst/>
-          </a:prstGeom>
-          <a:noFill/>
-          <a:ln/>
-        </p:spPr>
-        <p:txBody>
-          <a:bodyPr wrap="square" rtlCol="0" anchor="ctr"/>
-          <a:lstStyle/>
-          <a:p>
-            <a:pPr indent="0" marL="0">
-              <a:buNone/>
-            </a:pPr>
-            <a:endParaRPr lang="en-US" sz="920" dirty="0"/>
-          </a:p>
-        </p:txBody>
-      </p:sp>
-      <p:sp>
-        <p:nvSpPr>
-          <p:cNvPr id="15" name="Text 13"/>
-          <p:cNvSpPr/>
-          <p:nvPr/>
-        </p:nvSpPr>
-        <p:spPr>
-          <a:xfrm>
-            <a:off x="685800" y="2884932"/>
-            <a:ext cx="4937760" cy="242316"/>
-          </a:xfrm>
-          <a:prstGeom prst="rect">
-            <a:avLst/>
-          </a:prstGeom>
-          <a:noFill/>
-          <a:ln/>
-        </p:spPr>
-        <p:txBody>
-          <a:bodyPr wrap="square" rtlCol="0" anchor="ctr"/>
-          <a:lstStyle/>
-          <a:p>
-            <a:pPr indent="0" marL="0">
-              <a:buNone/>
-            </a:pPr>
+              <a:t>receber_dano</a:t>
+            </a:r>
             <a:r>
               <a:rPr lang="en-US" sz="920" dirty="0">
                 <a:solidFill>
-                  <a:srgbClr val="C586C0"/>
+                  <a:srgbClr val="FFFFFF"/>
                 </a:solidFill>
                 <a:latin typeface="Consolas" pitchFamily="34" charset="0"/>
                 <a:ea typeface="Consolas" pitchFamily="34" charset="-122"/>
                 <a:cs typeface="Consolas" pitchFamily="34" charset="-120"/>
               </a:rPr>
-              <a:t xml:space="preserve">  def </a:t>
-            </a:r>
-            <a:pPr indent="0" marL="0">
+              <a:t>(self, dano):</a:t>
+            </a:r>
+            <a:endParaRPr lang="en-US" sz="920" dirty="0"/>
+          </a:p>
+        </p:txBody>
+      </p:sp>
+      <p:sp>
+        <p:nvSpPr>
+          <p:cNvPr id="16" name="Text 14"/>
+          <p:cNvSpPr/>
+          <p:nvPr/>
+        </p:nvSpPr>
+        <p:spPr>
+          <a:xfrm>
+            <a:off x="685800" y="3127248"/>
+            <a:ext cx="4937760" cy="242316"/>
+          </a:xfrm>
+          <a:prstGeom prst="rect">
+            <a:avLst/>
+          </a:prstGeom>
+          <a:noFill/>
+          <a:ln/>
+        </p:spPr>
+        <p:txBody>
+          <a:bodyPr wrap="square" rtlCol="0" anchor="ctr"/>
+          <a:lstStyle/>
+          <a:p>
+            <a:pPr marL="0" indent="0">
               <a:buNone/>
             </a:pPr>
             <a:r>
               <a:rPr lang="en-US" sz="920" dirty="0">
                 <a:solidFill>
-                  <a:srgbClr val="DCDCAA"/>
+                  <a:srgbClr val="C586C0"/>
                 </a:solidFill>
                 <a:latin typeface="Consolas" pitchFamily="34" charset="0"/>
                 <a:ea typeface="Consolas" pitchFamily="34" charset="-122"/>
                 <a:cs typeface="Consolas" pitchFamily="34" charset="-120"/>
               </a:rPr>
-              <a:t>receber_dano</a:t>
-            </a:r>
-            <a:pPr indent="0" marL="0">
-              <a:buNone/>
-            </a:pPr>
+              <a:t>    if </a:t>
+            </a:r>
             <a:r>
               <a:rPr lang="en-US" sz="920" dirty="0">
                 <a:solidFill>
-                  <a:srgbClr val="FFFFFF"/>
+                  <a:srgbClr val="9CDCFE"/>
                 </a:solidFill>
                 <a:latin typeface="Consolas" pitchFamily="34" charset="0"/>
                 <a:ea typeface="Consolas" pitchFamily="34" charset="-122"/>
                 <a:cs typeface="Consolas" pitchFamily="34" charset="-120"/>
               </a:rPr>
-              <a:t>(self, dano):</a:t>
-            </a:r>
-            <a:endParaRPr lang="en-US" sz="920" dirty="0"/>
-          </a:p>
-        </p:txBody>
-      </p:sp>
-      <p:sp>
-        <p:nvSpPr>
-          <p:cNvPr id="16" name="Text 14"/>
-          <p:cNvSpPr/>
-          <p:nvPr/>
-        </p:nvSpPr>
-        <p:spPr>
-          <a:xfrm>
-            <a:off x="685800" y="3127248"/>
-            <a:ext cx="4937760" cy="242316"/>
-          </a:xfrm>
-          <a:prstGeom prst="rect">
-            <a:avLst/>
-          </a:prstGeom>
-          <a:noFill/>
-          <a:ln/>
-        </p:spPr>
-        <p:txBody>
-          <a:bodyPr wrap="square" rtlCol="0" anchor="ctr"/>
-          <a:lstStyle/>
-          <a:p>
-            <a:pPr indent="0" marL="0">
-              <a:buNone/>
-            </a:pPr>
+              <a:t>dano </a:t>
+            </a:r>
             <a:r>
               <a:rPr lang="en-US" sz="920" dirty="0">
                 <a:solidFill>
-                  <a:srgbClr val="C586C0"/>
+                  <a:srgbClr val="FFFFFF"/>
                 </a:solidFill>
                 <a:latin typeface="Consolas" pitchFamily="34" charset="0"/>
                 <a:ea typeface="Consolas" pitchFamily="34" charset="-122"/>
                 <a:cs typeface="Consolas" pitchFamily="34" charset="-120"/>
               </a:rPr>
-              <a:t xml:space="preserve">    if </a:t>
-            </a:r>
-            <a:pPr indent="0" marL="0">
-              <a:buNone/>
-            </a:pPr>
+              <a:t>&lt; </a:t>
+            </a:r>
             <a:r>
               <a:rPr lang="en-US" sz="920" dirty="0">
                 <a:solidFill>
-                  <a:srgbClr val="9CDCFE"/>
+                  <a:srgbClr val="B5CEA8"/>
                 </a:solidFill>
                 <a:latin typeface="Consolas" pitchFamily="34" charset="0"/>
                 <a:ea typeface="Consolas" pitchFamily="34" charset="-122"/>
                 <a:cs typeface="Consolas" pitchFamily="34" charset="-120"/>
               </a:rPr>
-              <a:t xml:space="preserve">dano </a:t>
-            </a:r>
-            <a:pPr indent="0" marL="0">
-              <a:buNone/>
-            </a:pPr>
+              <a:t>0</a:t>
+            </a:r>
             <a:r>
               <a:rPr lang="en-US" sz="920" dirty="0">
                 <a:solidFill>
@@ -3854,145 +3698,130 @@
                 <a:ea typeface="Consolas" pitchFamily="34" charset="-122"/>
                 <a:cs typeface="Consolas" pitchFamily="34" charset="-120"/>
               </a:rPr>
-              <a:t xml:space="preserve">&lt; </a:t>
-            </a:r>
-            <a:pPr indent="0" marL="0">
+              <a:t>:</a:t>
+            </a:r>
+            <a:endParaRPr lang="en-US" sz="920" dirty="0"/>
+          </a:p>
+        </p:txBody>
+      </p:sp>
+      <p:sp>
+        <p:nvSpPr>
+          <p:cNvPr id="17" name="Text 15"/>
+          <p:cNvSpPr/>
+          <p:nvPr/>
+        </p:nvSpPr>
+        <p:spPr>
+          <a:xfrm>
+            <a:off x="685800" y="3369564"/>
+            <a:ext cx="4937760" cy="242316"/>
+          </a:xfrm>
+          <a:prstGeom prst="rect">
+            <a:avLst/>
+          </a:prstGeom>
+          <a:noFill/>
+          <a:ln/>
+        </p:spPr>
+        <p:txBody>
+          <a:bodyPr wrap="square" rtlCol="0" anchor="ctr"/>
+          <a:lstStyle/>
+          <a:p>
+            <a:pPr marL="0" indent="0">
               <a:buNone/>
             </a:pPr>
             <a:r>
               <a:rPr lang="en-US" sz="920" dirty="0">
                 <a:solidFill>
-                  <a:srgbClr val="B5CEA8"/>
+                  <a:srgbClr val="C586C0"/>
                 </a:solidFill>
                 <a:latin typeface="Consolas" pitchFamily="34" charset="0"/>
                 <a:ea typeface="Consolas" pitchFamily="34" charset="-122"/>
                 <a:cs typeface="Consolas" pitchFamily="34" charset="-120"/>
               </a:rPr>
-              <a:t>0</a:t>
-            </a:r>
-            <a:pPr indent="0" marL="0">
-              <a:buNone/>
-            </a:pPr>
+              <a:t>      raise </a:t>
+            </a:r>
             <a:r>
               <a:rPr lang="en-US" sz="920" dirty="0">
                 <a:solidFill>
-                  <a:srgbClr val="FFFFFF"/>
+                  <a:srgbClr val="4EC9B0"/>
                 </a:solidFill>
                 <a:latin typeface="Consolas" pitchFamily="34" charset="0"/>
                 <a:ea typeface="Consolas" pitchFamily="34" charset="-122"/>
                 <a:cs typeface="Consolas" pitchFamily="34" charset="-120"/>
               </a:rPr>
-              <a:t>:</a:t>
-            </a:r>
-            <a:endParaRPr lang="en-US" sz="920" dirty="0"/>
-          </a:p>
-        </p:txBody>
-      </p:sp>
-      <p:sp>
-        <p:nvSpPr>
-          <p:cNvPr id="17" name="Text 15"/>
-          <p:cNvSpPr/>
-          <p:nvPr/>
-        </p:nvSpPr>
-        <p:spPr>
-          <a:xfrm>
-            <a:off x="685800" y="3369564"/>
-            <a:ext cx="4937760" cy="242316"/>
-          </a:xfrm>
-          <a:prstGeom prst="rect">
-            <a:avLst/>
-          </a:prstGeom>
-          <a:noFill/>
-          <a:ln/>
-        </p:spPr>
-        <p:txBody>
-          <a:bodyPr wrap="square" rtlCol="0" anchor="ctr"/>
-          <a:lstStyle/>
-          <a:p>
-            <a:pPr indent="0" marL="0">
-              <a:buNone/>
-            </a:pPr>
+              <a:t>ValueError</a:t>
+            </a:r>
             <a:r>
               <a:rPr lang="en-US" sz="920" dirty="0">
                 <a:solidFill>
-                  <a:srgbClr val="C586C0"/>
+                  <a:srgbClr val="CE9178"/>
                 </a:solidFill>
                 <a:latin typeface="Consolas" pitchFamily="34" charset="0"/>
                 <a:ea typeface="Consolas" pitchFamily="34" charset="-122"/>
                 <a:cs typeface="Consolas" pitchFamily="34" charset="-120"/>
               </a:rPr>
-              <a:t xml:space="preserve">      raise </a:t>
-            </a:r>
-            <a:pPr indent="0" marL="0">
+              <a:t>("Dano invalido")</a:t>
+            </a:r>
+            <a:endParaRPr lang="en-US" sz="920" dirty="0"/>
+          </a:p>
+        </p:txBody>
+      </p:sp>
+      <p:sp>
+        <p:nvSpPr>
+          <p:cNvPr id="18" name="Text 16"/>
+          <p:cNvSpPr/>
+          <p:nvPr/>
+        </p:nvSpPr>
+        <p:spPr>
+          <a:xfrm>
+            <a:off x="685800" y="3611880"/>
+            <a:ext cx="4937760" cy="242316"/>
+          </a:xfrm>
+          <a:prstGeom prst="rect">
+            <a:avLst/>
+          </a:prstGeom>
+          <a:noFill/>
+          <a:ln/>
+        </p:spPr>
+        <p:txBody>
+          <a:bodyPr wrap="square" rtlCol="0" anchor="ctr"/>
+          <a:lstStyle/>
+          <a:p>
+            <a:pPr marL="0" indent="0">
               <a:buNone/>
             </a:pPr>
             <a:r>
               <a:rPr lang="en-US" sz="920" dirty="0">
                 <a:solidFill>
-                  <a:srgbClr val="4EC9B0"/>
+                  <a:srgbClr val="9CDCFE"/>
                 </a:solidFill>
                 <a:latin typeface="Consolas" pitchFamily="34" charset="0"/>
                 <a:ea typeface="Consolas" pitchFamily="34" charset="-122"/>
                 <a:cs typeface="Consolas" pitchFamily="34" charset="-120"/>
               </a:rPr>
-              <a:t>ValueError</a:t>
-            </a:r>
-            <a:pPr indent="0" marL="0">
-              <a:buNone/>
-            </a:pPr>
+              <a:t>    self</a:t>
+            </a:r>
             <a:r>
               <a:rPr lang="en-US" sz="920" dirty="0">
                 <a:solidFill>
-                  <a:srgbClr val="CE9178"/>
+                  <a:srgbClr val="FFFFFF"/>
                 </a:solidFill>
                 <a:latin typeface="Consolas" pitchFamily="34" charset="0"/>
                 <a:ea typeface="Consolas" pitchFamily="34" charset="-122"/>
                 <a:cs typeface="Consolas" pitchFamily="34" charset="-120"/>
               </a:rPr>
-              <a:t>("Dano invalido")</a:t>
-            </a:r>
-            <a:endParaRPr lang="en-US" sz="920" dirty="0"/>
-          </a:p>
-        </p:txBody>
-      </p:sp>
-      <p:sp>
-        <p:nvSpPr>
-          <p:cNvPr id="18" name="Text 16"/>
-          <p:cNvSpPr/>
-          <p:nvPr/>
-        </p:nvSpPr>
-        <p:spPr>
-          <a:xfrm>
-            <a:off x="685800" y="3611880"/>
-            <a:ext cx="4937760" cy="242316"/>
-          </a:xfrm>
-          <a:prstGeom prst="rect">
-            <a:avLst/>
-          </a:prstGeom>
-          <a:noFill/>
-          <a:ln/>
-        </p:spPr>
-        <p:txBody>
-          <a:bodyPr wrap="square" rtlCol="0" anchor="ctr"/>
-          <a:lstStyle/>
-          <a:p>
-            <a:pPr indent="0" marL="0">
-              <a:buNone/>
-            </a:pPr>
+              <a:t>.__hp = </a:t>
+            </a:r>
             <a:r>
               <a:rPr lang="en-US" sz="920" dirty="0">
                 <a:solidFill>
-                  <a:srgbClr val="9CDCFE"/>
+                  <a:srgbClr val="DCDCAA"/>
                 </a:solidFill>
                 <a:latin typeface="Consolas" pitchFamily="34" charset="0"/>
                 <a:ea typeface="Consolas" pitchFamily="34" charset="-122"/>
                 <a:cs typeface="Consolas" pitchFamily="34" charset="-120"/>
               </a:rPr>
-              <a:t xml:space="preserve">    self</a:t>
-            </a:r>
-            <a:pPr indent="0" marL="0">
-              <a:buNone/>
-            </a:pPr>
+              <a:t>max</a:t>
+            </a:r>
             <a:r>
               <a:rPr lang="en-US" sz="920" dirty="0">
                 <a:solidFill>
@@ -4002,67 +3831,108 @@
                 <a:ea typeface="Consolas" pitchFamily="34" charset="-122"/>
                 <a:cs typeface="Consolas" pitchFamily="34" charset="-120"/>
               </a:rPr>
-              <a:t xml:space="preserve">.__hp </a:t>
-            </a:r>
-            <a:pPr indent="0" marL="0">
-              <a:buNone/>
-            </a:pPr>
+              <a:t>(</a:t>
+            </a:r>
             <a:r>
               <a:rPr lang="en-US" sz="920" dirty="0">
                 <a:solidFill>
-                  <a:srgbClr val="FFFFFF"/>
+                  <a:srgbClr val="B5CEA8"/>
                 </a:solidFill>
                 <a:latin typeface="Consolas" pitchFamily="34" charset="0"/>
                 <a:ea typeface="Consolas" pitchFamily="34" charset="-122"/>
                 <a:cs typeface="Consolas" pitchFamily="34" charset="-120"/>
               </a:rPr>
-              <a:t xml:space="preserve">= </a:t>
-            </a:r>
-            <a:pPr indent="0" marL="0">
-              <a:buNone/>
-            </a:pPr>
+              <a:t>0</a:t>
+            </a:r>
             <a:r>
               <a:rPr lang="en-US" sz="920" dirty="0">
                 <a:solidFill>
-                  <a:srgbClr val="DCDCAA"/>
+                  <a:srgbClr val="FFFFFF"/>
                 </a:solidFill>
                 <a:latin typeface="Consolas" pitchFamily="34" charset="0"/>
                 <a:ea typeface="Consolas" pitchFamily="34" charset="-122"/>
                 <a:cs typeface="Consolas" pitchFamily="34" charset="-120"/>
               </a:rPr>
-              <a:t>max</a:t>
-            </a:r>
-            <a:pPr indent="0" marL="0">
+              <a:t>, self.__hp - dano)</a:t>
+            </a:r>
+            <a:endParaRPr lang="en-US" sz="920" dirty="0"/>
+          </a:p>
+        </p:txBody>
+      </p:sp>
+      <p:sp>
+        <p:nvSpPr>
+          <p:cNvPr id="19" name="Text 17"/>
+          <p:cNvSpPr/>
+          <p:nvPr/>
+        </p:nvSpPr>
+        <p:spPr>
+          <a:xfrm>
+            <a:off x="685800" y="3854196"/>
+            <a:ext cx="4937760" cy="242316"/>
+          </a:xfrm>
+          <a:prstGeom prst="rect">
+            <a:avLst/>
+          </a:prstGeom>
+          <a:noFill/>
+          <a:ln/>
+        </p:spPr>
+        <p:txBody>
+          <a:bodyPr wrap="square" rtlCol="0" anchor="ctr"/>
+          <a:lstStyle/>
+          <a:p>
+            <a:pPr marL="0" indent="0">
+              <a:buNone/>
+            </a:pPr>
+            <a:endParaRPr lang="en-US" sz="920" dirty="0"/>
+          </a:p>
+        </p:txBody>
+      </p:sp>
+      <p:sp>
+        <p:nvSpPr>
+          <p:cNvPr id="20" name="Text 18"/>
+          <p:cNvSpPr/>
+          <p:nvPr/>
+        </p:nvSpPr>
+        <p:spPr>
+          <a:xfrm>
+            <a:off x="685800" y="4096512"/>
+            <a:ext cx="4937760" cy="242316"/>
+          </a:xfrm>
+          <a:prstGeom prst="rect">
+            <a:avLst/>
+          </a:prstGeom>
+          <a:noFill/>
+          <a:ln/>
+        </p:spPr>
+        <p:txBody>
+          <a:bodyPr wrap="square" rtlCol="0" anchor="ctr"/>
+          <a:lstStyle/>
+          <a:p>
+            <a:pPr marL="0" indent="0">
               <a:buNone/>
             </a:pPr>
             <a:r>
               <a:rPr lang="en-US" sz="920" dirty="0">
                 <a:solidFill>
-                  <a:srgbClr val="FFFFFF"/>
+                  <a:srgbClr val="C586C0"/>
                 </a:solidFill>
                 <a:latin typeface="Consolas" pitchFamily="34" charset="0"/>
                 <a:ea typeface="Consolas" pitchFamily="34" charset="-122"/>
                 <a:cs typeface="Consolas" pitchFamily="34" charset="-120"/>
               </a:rPr>
-              <a:t>(</a:t>
-            </a:r>
-            <a:pPr indent="0" marL="0">
-              <a:buNone/>
-            </a:pPr>
+              <a:t>  def </a:t>
+            </a:r>
             <a:r>
               <a:rPr lang="en-US" sz="920" dirty="0">
                 <a:solidFill>
-                  <a:srgbClr val="B5CEA8"/>
+                  <a:srgbClr val="DCDCAA"/>
                 </a:solidFill>
                 <a:latin typeface="Consolas" pitchFamily="34" charset="0"/>
                 <a:ea typeface="Consolas" pitchFamily="34" charset="-122"/>
                 <a:cs typeface="Consolas" pitchFamily="34" charset="-120"/>
               </a:rPr>
-              <a:t>0</a:t>
-            </a:r>
-            <a:pPr indent="0" marL="0">
-              <a:buNone/>
-            </a:pPr>
+              <a:t>get_hp</a:t>
+            </a:r>
             <a:r>
               <a:rPr lang="en-US" sz="920" dirty="0">
                 <a:solidFill>
@@ -4072,64 +3942,8 @@
                 <a:ea typeface="Consolas" pitchFamily="34" charset="-122"/>
                 <a:cs typeface="Consolas" pitchFamily="34" charset="-120"/>
               </a:rPr>
-              <a:t>, self.__hp - dano)</a:t>
-            </a:r>
-            <a:endParaRPr lang="en-US" sz="920" dirty="0"/>
-          </a:p>
-        </p:txBody>
-      </p:sp>
-      <p:sp>
-        <p:nvSpPr>
-          <p:cNvPr id="19" name="Text 17"/>
-          <p:cNvSpPr/>
-          <p:nvPr/>
-        </p:nvSpPr>
-        <p:spPr>
-          <a:xfrm>
-            <a:off x="685800" y="3854196"/>
-            <a:ext cx="4937760" cy="242316"/>
-          </a:xfrm>
-          <a:prstGeom prst="rect">
-            <a:avLst/>
-          </a:prstGeom>
-          <a:noFill/>
-          <a:ln/>
-        </p:spPr>
-        <p:txBody>
-          <a:bodyPr wrap="square" rtlCol="0" anchor="ctr"/>
-          <a:lstStyle/>
-          <a:p>
-            <a:pPr indent="0" marL="0">
-              <a:buNone/>
-            </a:pPr>
-            <a:endParaRPr lang="en-US" sz="920" dirty="0"/>
-          </a:p>
-        </p:txBody>
-      </p:sp>
-      <p:sp>
-        <p:nvSpPr>
-          <p:cNvPr id="20" name="Text 18"/>
-          <p:cNvSpPr/>
-          <p:nvPr/>
-        </p:nvSpPr>
-        <p:spPr>
-          <a:xfrm>
-            <a:off x="685800" y="4096512"/>
-            <a:ext cx="4937760" cy="242316"/>
-          </a:xfrm>
-          <a:prstGeom prst="rect">
-            <a:avLst/>
-          </a:prstGeom>
-          <a:noFill/>
-          <a:ln/>
-        </p:spPr>
-        <p:txBody>
-          <a:bodyPr wrap="square" rtlCol="0" anchor="ctr"/>
-          <a:lstStyle/>
-          <a:p>
-            <a:pPr indent="0" marL="0">
-              <a:buNone/>
-            </a:pPr>
+              <a:t>(self): </a:t>
+            </a:r>
             <a:r>
               <a:rPr lang="en-US" sz="920" dirty="0">
                 <a:solidFill>
@@ -4139,92 +3953,80 @@
                 <a:ea typeface="Consolas" pitchFamily="34" charset="-122"/>
                 <a:cs typeface="Consolas" pitchFamily="34" charset="-120"/>
               </a:rPr>
-              <a:t xml:space="preserve">  def </a:t>
-            </a:r>
-            <a:pPr indent="0" marL="0">
-              <a:buNone/>
-            </a:pPr>
+              <a:t>return </a:t>
+            </a:r>
             <a:r>
               <a:rPr lang="en-US" sz="920" dirty="0">
                 <a:solidFill>
-                  <a:srgbClr val="DCDCAA"/>
+                  <a:srgbClr val="9CDCFE"/>
                 </a:solidFill>
                 <a:latin typeface="Consolas" pitchFamily="34" charset="0"/>
                 <a:ea typeface="Consolas" pitchFamily="34" charset="-122"/>
                 <a:cs typeface="Consolas" pitchFamily="34" charset="-120"/>
               </a:rPr>
-              <a:t>get_hp</a:t>
-            </a:r>
-            <a:pPr indent="0" marL="0">
+              <a:t>self.__hp</a:t>
+            </a:r>
+            <a:endParaRPr lang="en-US" sz="920" dirty="0"/>
+          </a:p>
+        </p:txBody>
+      </p:sp>
+      <p:sp>
+        <p:nvSpPr>
+          <p:cNvPr id="21" name="Text 19"/>
+          <p:cNvSpPr/>
+          <p:nvPr/>
+        </p:nvSpPr>
+        <p:spPr>
+          <a:xfrm>
+            <a:off x="685800" y="4338828"/>
+            <a:ext cx="4937760" cy="242316"/>
+          </a:xfrm>
+          <a:prstGeom prst="rect">
+            <a:avLst/>
+          </a:prstGeom>
+          <a:noFill/>
+          <a:ln/>
+        </p:spPr>
+        <p:txBody>
+          <a:bodyPr wrap="square" rtlCol="0" anchor="ctr"/>
+          <a:lstStyle/>
+          <a:p>
+            <a:pPr marL="0" indent="0">
               <a:buNone/>
             </a:pPr>
             <a:r>
               <a:rPr lang="en-US" sz="920" dirty="0">
                 <a:solidFill>
-                  <a:srgbClr val="FFFFFF"/>
+                  <a:srgbClr val="C586C0"/>
                 </a:solidFill>
                 <a:latin typeface="Consolas" pitchFamily="34" charset="0"/>
                 <a:ea typeface="Consolas" pitchFamily="34" charset="-122"/>
                 <a:cs typeface="Consolas" pitchFamily="34" charset="-120"/>
               </a:rPr>
-              <a:t xml:space="preserve">(self): </a:t>
-            </a:r>
-            <a:pPr indent="0" marL="0">
-              <a:buNone/>
-            </a:pPr>
+              <a:t>  def </a:t>
+            </a:r>
             <a:r>
               <a:rPr lang="en-US" sz="920" dirty="0">
                 <a:solidFill>
-                  <a:srgbClr val="C586C0"/>
+                  <a:srgbClr val="DCDCAA"/>
                 </a:solidFill>
                 <a:latin typeface="Consolas" pitchFamily="34" charset="0"/>
                 <a:ea typeface="Consolas" pitchFamily="34" charset="-122"/>
                 <a:cs typeface="Consolas" pitchFamily="34" charset="-120"/>
               </a:rPr>
-              <a:t xml:space="preserve">return </a:t>
-            </a:r>
-            <a:pPr indent="0" marL="0">
-              <a:buNone/>
-            </a:pPr>
+              <a:t>esta_vivo</a:t>
+            </a:r>
             <a:r>
               <a:rPr lang="en-US" sz="920" dirty="0">
                 <a:solidFill>
-                  <a:srgbClr val="9CDCFE"/>
+                  <a:srgbClr val="FFFFFF"/>
                 </a:solidFill>
                 <a:latin typeface="Consolas" pitchFamily="34" charset="0"/>
                 <a:ea typeface="Consolas" pitchFamily="34" charset="-122"/>
                 <a:cs typeface="Consolas" pitchFamily="34" charset="-120"/>
               </a:rPr>
-              <a:t>self.__hp</a:t>
-            </a:r>
-            <a:endParaRPr lang="en-US" sz="920" dirty="0"/>
-          </a:p>
-        </p:txBody>
-      </p:sp>
-      <p:sp>
-        <p:nvSpPr>
-          <p:cNvPr id="21" name="Text 19"/>
-          <p:cNvSpPr/>
-          <p:nvPr/>
-        </p:nvSpPr>
-        <p:spPr>
-          <a:xfrm>
-            <a:off x="685800" y="4338828"/>
-            <a:ext cx="4937760" cy="242316"/>
-          </a:xfrm>
-          <a:prstGeom prst="rect">
-            <a:avLst/>
-          </a:prstGeom>
-          <a:noFill/>
-          <a:ln/>
-        </p:spPr>
-        <p:txBody>
-          <a:bodyPr wrap="square" rtlCol="0" anchor="ctr"/>
-          <a:lstStyle/>
-          <a:p>
-            <a:pPr indent="0" marL="0">
-              <a:buNone/>
-            </a:pPr>
+              <a:t>(self): </a:t>
+            </a:r>
             <a:r>
               <a:rPr lang="en-US" sz="920" dirty="0">
                 <a:solidFill>
@@ -4234,67 +4036,19 @@
                 <a:ea typeface="Consolas" pitchFamily="34" charset="-122"/>
                 <a:cs typeface="Consolas" pitchFamily="34" charset="-120"/>
               </a:rPr>
-              <a:t xml:space="preserve">  def </a:t>
-            </a:r>
-            <a:pPr indent="0" marL="0">
-              <a:buNone/>
-            </a:pPr>
+              <a:t>return </a:t>
+            </a:r>
             <a:r>
               <a:rPr lang="en-US" sz="920" dirty="0">
                 <a:solidFill>
-                  <a:srgbClr val="DCDCAA"/>
+                  <a:srgbClr val="9CDCFE"/>
                 </a:solidFill>
                 <a:latin typeface="Consolas" pitchFamily="34" charset="0"/>
                 <a:ea typeface="Consolas" pitchFamily="34" charset="-122"/>
                 <a:cs typeface="Consolas" pitchFamily="34" charset="-120"/>
               </a:rPr>
-              <a:t>esta_vivo</a:t>
-            </a:r>
-            <a:pPr indent="0" marL="0">
-              <a:buNone/>
-            </a:pPr>
-            <a:r>
-              <a:rPr lang="en-US" sz="920" dirty="0">
-                <a:solidFill>
-                  <a:srgbClr val="FFFFFF"/>
-                </a:solidFill>
-                <a:latin typeface="Consolas" pitchFamily="34" charset="0"/>
-                <a:ea typeface="Consolas" pitchFamily="34" charset="-122"/>
-                <a:cs typeface="Consolas" pitchFamily="34" charset="-120"/>
-              </a:rPr>
-              <a:t xml:space="preserve">(self): </a:t>
-            </a:r>
-            <a:pPr indent="0" marL="0">
-              <a:buNone/>
-            </a:pPr>
-            <a:r>
-              <a:rPr lang="en-US" sz="920" dirty="0">
-                <a:solidFill>
-                  <a:srgbClr val="C586C0"/>
-                </a:solidFill>
-                <a:latin typeface="Consolas" pitchFamily="34" charset="0"/>
-                <a:ea typeface="Consolas" pitchFamily="34" charset="-122"/>
-                <a:cs typeface="Consolas" pitchFamily="34" charset="-120"/>
-              </a:rPr>
-              <a:t xml:space="preserve">return </a:t>
-            </a:r>
-            <a:pPr indent="0" marL="0">
-              <a:buNone/>
-            </a:pPr>
-            <a:r>
-              <a:rPr lang="en-US" sz="920" dirty="0">
-                <a:solidFill>
-                  <a:srgbClr val="9CDCFE"/>
-                </a:solidFill>
-                <a:latin typeface="Consolas" pitchFamily="34" charset="0"/>
-                <a:ea typeface="Consolas" pitchFamily="34" charset="-122"/>
-                <a:cs typeface="Consolas" pitchFamily="34" charset="-120"/>
-              </a:rPr>
-              <a:t xml:space="preserve">self.__hp &gt; </a:t>
-            </a:r>
-            <a:pPr indent="0" marL="0">
-              <a:buNone/>
-            </a:pPr>
+              <a:t>self.__hp &gt; </a:t>
+            </a:r>
             <a:r>
               <a:rPr lang="en-US" sz="920" dirty="0">
                 <a:solidFill>
@@ -4334,6 +4088,13 @@
             <a:prstDash val="solid"/>
           </a:ln>
         </p:spPr>
+        <p:txBody>
+          <a:bodyPr/>
+          <a:lstStyle/>
+          <a:p>
+            <a:endParaRPr lang="pt-BR"/>
+          </a:p>
+        </p:txBody>
       </p:sp>
       <p:sp>
         <p:nvSpPr>
@@ -4356,7 +4117,7 @@
           <a:bodyPr wrap="square" rtlCol="0" anchor="ctr"/>
           <a:lstStyle/>
           <a:p>
-            <a:pPr indent="0" marL="0">
+            <a:pPr marL="0" indent="0">
               <a:buNone/>
             </a:pPr>
             <a:r>
@@ -4395,6 +4156,13 @@
             <a:prstDash val="solid"/>
           </a:ln>
         </p:spPr>
+        <p:txBody>
+          <a:bodyPr/>
+          <a:lstStyle/>
+          <a:p>
+            <a:endParaRPr lang="pt-BR"/>
+          </a:p>
+        </p:txBody>
       </p:sp>
       <p:sp>
         <p:nvSpPr>
@@ -4417,7 +4185,7 @@
           <a:bodyPr wrap="square" rtlCol="0" anchor="ctr"/>
           <a:lstStyle/>
           <a:p>
-            <a:pPr indent="0" marL="0">
+            <a:pPr marL="0" indent="0">
               <a:buNone/>
             </a:pPr>
             <a:r>
@@ -4456,6 +4224,13 @@
             <a:prstDash val="solid"/>
           </a:ln>
         </p:spPr>
+        <p:txBody>
+          <a:bodyPr/>
+          <a:lstStyle/>
+          <a:p>
+            <a:endParaRPr lang="pt-BR"/>
+          </a:p>
+        </p:txBody>
       </p:sp>
       <p:sp>
         <p:nvSpPr>
@@ -4478,7 +4253,7 @@
           <a:bodyPr wrap="square" rtlCol="0" anchor="ctr"/>
           <a:lstStyle/>
           <a:p>
-            <a:pPr indent="0" marL="0">
+            <a:pPr marL="0" indent="0">
               <a:buNone/>
             </a:pPr>
             <a:r>
@@ -4517,6 +4292,13 @@
             <a:prstDash val="solid"/>
           </a:ln>
         </p:spPr>
+        <p:txBody>
+          <a:bodyPr/>
+          <a:lstStyle/>
+          <a:p>
+            <a:endParaRPr lang="pt-BR"/>
+          </a:p>
+        </p:txBody>
       </p:sp>
       <p:sp>
         <p:nvSpPr>
@@ -4539,7 +4321,7 @@
           <a:bodyPr wrap="square" rtlCol="0" anchor="ctr"/>
           <a:lstStyle/>
           <a:p>
-            <a:pPr indent="0" marL="0">
+            <a:pPr marL="0" indent="0">
               <a:buNone/>
             </a:pPr>
             <a:r>
@@ -4578,6 +4360,13 @@
             <a:prstDash val="solid"/>
           </a:ln>
         </p:spPr>
+        <p:txBody>
+          <a:bodyPr/>
+          <a:lstStyle/>
+          <a:p>
+            <a:endParaRPr lang="pt-BR"/>
+          </a:p>
+        </p:txBody>
       </p:sp>
       <p:sp>
         <p:nvSpPr>
@@ -4600,7 +4389,7 @@
           <a:bodyPr wrap="square" rtlCol="0" anchor="ctr"/>
           <a:lstStyle/>
           <a:p>
-            <a:pPr algn="ctr" indent="0" marL="0">
+            <a:pPr marL="0" indent="0" algn="ctr">
               <a:buNone/>
             </a:pPr>
             <a:r>
@@ -4631,6 +4420,7 @@
         <a:solidFill>
           <a:srgbClr val="0D0D1A"/>
         </a:solidFill>
+        <a:effectLst/>
       </p:bgPr>
     </p:bg>
     <p:spTree>
@@ -4671,6 +4461,13 @@
             <a:prstDash val="solid"/>
           </a:ln>
         </p:spPr>
+        <p:txBody>
+          <a:bodyPr/>
+          <a:lstStyle/>
+          <a:p>
+            <a:endParaRPr lang="pt-BR"/>
+          </a:p>
+        </p:txBody>
       </p:sp>
       <p:sp>
         <p:nvSpPr>
@@ -4696,6 +4493,13 @@
             <a:prstDash val="solid"/>
           </a:ln>
         </p:spPr>
+        <p:txBody>
+          <a:bodyPr/>
+          <a:lstStyle/>
+          <a:p>
+            <a:endParaRPr lang="pt-BR"/>
+          </a:p>
+        </p:txBody>
       </p:sp>
       <p:sp>
         <p:nvSpPr>
@@ -4718,11 +4522,11 @@
           <a:bodyPr wrap="square" rtlCol="0" anchor="ctr"/>
           <a:lstStyle/>
           <a:p>
-            <a:pPr indent="0" marL="0">
-              <a:buNone/>
-            </a:pPr>
-            <a:r>
-              <a:rPr lang="en-US" sz="1100" b="1" spc="300" kern="0" dirty="0">
+            <a:pPr marL="0" indent="0">
+              <a:buNone/>
+            </a:pPr>
+            <a:r>
+              <a:rPr lang="en-US" sz="1100" b="1" kern="0" spc="300" dirty="0">
                 <a:solidFill>
                   <a:srgbClr val="F5A623"/>
                 </a:solidFill>
@@ -4757,7 +4561,7 @@
           <a:bodyPr wrap="square" rtlCol="0" anchor="ctr"/>
           <a:lstStyle/>
           <a:p>
-            <a:pPr indent="0" marL="0">
+            <a:pPr marL="0" indent="0">
               <a:buNone/>
             </a:pPr>
             <a:r>
@@ -4799,6 +4603,13 @@
             <a:prstDash val="solid"/>
           </a:ln>
         </p:spPr>
+        <p:txBody>
+          <a:bodyPr/>
+          <a:lstStyle/>
+          <a:p>
+            <a:endParaRPr lang="pt-BR"/>
+          </a:p>
+        </p:txBody>
       </p:sp>
       <p:pic>
         <p:nvPicPr>
@@ -4809,8 +4620,8 @@
           <p:nvPr/>
         </p:nvPicPr>
         <p:blipFill>
-          <a:blip r:embed="rId1"/>
-          <a:srcRect l="0" r="0" t="0" b="0"/>
+          <a:blip r:embed="rId3"/>
+          <a:srcRect/>
           <a:stretch/>
         </p:blipFill>
         <p:spPr>
@@ -4847,6 +4658,13 @@
             <a:prstDash val="solid"/>
           </a:ln>
         </p:spPr>
+        <p:txBody>
+          <a:bodyPr/>
+          <a:lstStyle/>
+          <a:p>
+            <a:endParaRPr lang="pt-BR"/>
+          </a:p>
+        </p:txBody>
       </p:sp>
       <p:sp>
         <p:nvSpPr>
@@ -4869,7 +4687,7 @@
           <a:bodyPr wrap="square" rtlCol="0" anchor="ctr"/>
           <a:lstStyle/>
           <a:p>
-            <a:pPr algn="ctr" indent="0" marL="0">
+            <a:pPr marL="0" indent="0" algn="ctr">
               <a:buNone/>
             </a:pPr>
             <a:r>
@@ -4900,6 +4718,7 @@
         <a:solidFill>
           <a:srgbClr val="0D0D1A"/>
         </a:solidFill>
+        <a:effectLst/>
       </p:bgPr>
     </p:bg>
     <p:spTree>
@@ -4940,6 +4759,13 @@
             <a:prstDash val="solid"/>
           </a:ln>
         </p:spPr>
+        <p:txBody>
+          <a:bodyPr/>
+          <a:lstStyle/>
+          <a:p>
+            <a:endParaRPr lang="pt-BR"/>
+          </a:p>
+        </p:txBody>
       </p:sp>
       <p:sp>
         <p:nvSpPr>
@@ -4965,6 +4791,13 @@
             <a:prstDash val="solid"/>
           </a:ln>
         </p:spPr>
+        <p:txBody>
+          <a:bodyPr/>
+          <a:lstStyle/>
+          <a:p>
+            <a:endParaRPr lang="pt-BR"/>
+          </a:p>
+        </p:txBody>
       </p:sp>
       <p:sp>
         <p:nvSpPr>
@@ -4987,11 +4820,11 @@
           <a:bodyPr wrap="square" rtlCol="0" anchor="ctr"/>
           <a:lstStyle/>
           <a:p>
-            <a:pPr indent="0" marL="0">
-              <a:buNone/>
-            </a:pPr>
-            <a:r>
-              <a:rPr lang="en-US" sz="1100" b="1" spc="300" kern="0" dirty="0">
+            <a:pPr marL="0" indent="0">
+              <a:buNone/>
+            </a:pPr>
+            <a:r>
+              <a:rPr lang="en-US" sz="1100" b="1" kern="0" spc="300" dirty="0">
                 <a:solidFill>
                   <a:srgbClr val="E94560"/>
                 </a:solidFill>
@@ -5026,7 +4859,7 @@
           <a:bodyPr wrap="square" rtlCol="0" anchor="ctr"/>
           <a:lstStyle/>
           <a:p>
-            <a:pPr indent="0" marL="0">
+            <a:pPr marL="0" indent="0">
               <a:buNone/>
             </a:pPr>
             <a:r>
@@ -5068,6 +4901,13 @@
             <a:prstDash val="solid"/>
           </a:ln>
         </p:spPr>
+        <p:txBody>
+          <a:bodyPr/>
+          <a:lstStyle/>
+          <a:p>
+            <a:endParaRPr lang="pt-BR"/>
+          </a:p>
+        </p:txBody>
       </p:sp>
       <p:sp>
         <p:nvSpPr>
@@ -5093,6 +4933,13 @@
             <a:prstDash val="solid"/>
           </a:ln>
         </p:spPr>
+        <p:txBody>
+          <a:bodyPr/>
+          <a:lstStyle/>
+          <a:p>
+            <a:endParaRPr lang="pt-BR"/>
+          </a:p>
+        </p:txBody>
       </p:sp>
       <p:sp>
         <p:nvSpPr>
@@ -5118,6 +4965,13 @@
             <a:prstDash val="solid"/>
           </a:ln>
         </p:spPr>
+        <p:txBody>
+          <a:bodyPr/>
+          <a:lstStyle/>
+          <a:p>
+            <a:endParaRPr lang="pt-BR"/>
+          </a:p>
+        </p:txBody>
       </p:sp>
       <p:sp>
         <p:nvSpPr>
@@ -5143,6 +4997,13 @@
             <a:prstDash val="solid"/>
           </a:ln>
         </p:spPr>
+        <p:txBody>
+          <a:bodyPr/>
+          <a:lstStyle/>
+          <a:p>
+            <a:endParaRPr lang="pt-BR"/>
+          </a:p>
+        </p:txBody>
       </p:sp>
       <p:sp>
         <p:nvSpPr>
@@ -5165,7 +5026,7 @@
           <a:bodyPr wrap="square" rtlCol="0" anchor="ctr"/>
           <a:lstStyle/>
           <a:p>
-            <a:pPr algn="ctr" indent="0" marL="0">
+            <a:pPr marL="0" indent="0" algn="ctr">
               <a:buNone/>
             </a:pPr>
             <a:r>
@@ -5201,7 +5062,7 @@
           <a:bodyPr wrap="square" rtlCol="0" anchor="ctr"/>
           <a:lstStyle/>
           <a:p>
-            <a:pPr indent="0" marL="0">
+            <a:pPr marL="0" indent="0">
               <a:buNone/>
             </a:pPr>
             <a:r>
@@ -5237,7 +5098,7 @@
           <a:bodyPr wrap="square" rtlCol="0" anchor="ctr"/>
           <a:lstStyle/>
           <a:p>
-            <a:pPr indent="0" marL="0">
+            <a:pPr marL="0" indent="0">
               <a:buNone/>
             </a:pPr>
             <a:r>
@@ -5276,6 +5137,13 @@
             <a:prstDash val="solid"/>
           </a:ln>
         </p:spPr>
+        <p:txBody>
+          <a:bodyPr/>
+          <a:lstStyle/>
+          <a:p>
+            <a:endParaRPr lang="pt-BR"/>
+          </a:p>
+        </p:txBody>
       </p:sp>
       <p:sp>
         <p:nvSpPr>
@@ -5301,6 +5169,13 @@
             <a:prstDash val="solid"/>
           </a:ln>
         </p:spPr>
+        <p:txBody>
+          <a:bodyPr/>
+          <a:lstStyle/>
+          <a:p>
+            <a:endParaRPr lang="pt-BR"/>
+          </a:p>
+        </p:txBody>
       </p:sp>
       <p:sp>
         <p:nvSpPr>
@@ -5326,6 +5201,13 @@
             <a:prstDash val="solid"/>
           </a:ln>
         </p:spPr>
+        <p:txBody>
+          <a:bodyPr/>
+          <a:lstStyle/>
+          <a:p>
+            <a:endParaRPr lang="pt-BR"/>
+          </a:p>
+        </p:txBody>
       </p:sp>
       <p:sp>
         <p:nvSpPr>
@@ -5348,7 +5230,7 @@
           <a:bodyPr wrap="square" rtlCol="0" anchor="ctr"/>
           <a:lstStyle/>
           <a:p>
-            <a:pPr algn="ctr" indent="0" marL="0">
+            <a:pPr marL="0" indent="0" algn="ctr">
               <a:buNone/>
             </a:pPr>
             <a:r>
@@ -5384,7 +5266,7 @@
           <a:bodyPr wrap="square" rtlCol="0" anchor="ctr"/>
           <a:lstStyle/>
           <a:p>
-            <a:pPr indent="0" marL="0">
+            <a:pPr marL="0" indent="0">
               <a:buNone/>
             </a:pPr>
             <a:r>
@@ -5420,7 +5302,7 @@
           <a:bodyPr wrap="square" rtlCol="0" anchor="ctr"/>
           <a:lstStyle/>
           <a:p>
-            <a:pPr indent="0" marL="0">
+            <a:pPr marL="0" indent="0">
               <a:buNone/>
             </a:pPr>
             <a:r>
@@ -5459,6 +5341,13 @@
             <a:prstDash val="solid"/>
           </a:ln>
         </p:spPr>
+        <p:txBody>
+          <a:bodyPr/>
+          <a:lstStyle/>
+          <a:p>
+            <a:endParaRPr lang="pt-BR"/>
+          </a:p>
+        </p:txBody>
       </p:sp>
       <p:sp>
         <p:nvSpPr>
@@ -5484,6 +5373,13 @@
             <a:prstDash val="solid"/>
           </a:ln>
         </p:spPr>
+        <p:txBody>
+          <a:bodyPr/>
+          <a:lstStyle/>
+          <a:p>
+            <a:endParaRPr lang="pt-BR"/>
+          </a:p>
+        </p:txBody>
       </p:sp>
       <p:sp>
         <p:nvSpPr>
@@ -5509,6 +5405,13 @@
             <a:prstDash val="solid"/>
           </a:ln>
         </p:spPr>
+        <p:txBody>
+          <a:bodyPr/>
+          <a:lstStyle/>
+          <a:p>
+            <a:endParaRPr lang="pt-BR"/>
+          </a:p>
+        </p:txBody>
       </p:sp>
       <p:sp>
         <p:nvSpPr>
@@ -5531,7 +5434,7 @@
           <a:bodyPr wrap="square" rtlCol="0" anchor="ctr"/>
           <a:lstStyle/>
           <a:p>
-            <a:pPr algn="ctr" indent="0" marL="0">
+            <a:pPr marL="0" indent="0" algn="ctr">
               <a:buNone/>
             </a:pPr>
             <a:r>
@@ -5567,7 +5470,7 @@
           <a:bodyPr wrap="square" rtlCol="0" anchor="ctr"/>
           <a:lstStyle/>
           <a:p>
-            <a:pPr indent="0" marL="0">
+            <a:pPr marL="0" indent="0">
               <a:buNone/>
             </a:pPr>
             <a:r>
@@ -5603,7 +5506,7 @@
           <a:bodyPr wrap="square" rtlCol="0" anchor="ctr"/>
           <a:lstStyle/>
           <a:p>
-            <a:pPr indent="0" marL="0">
+            <a:pPr marL="0" indent="0">
               <a:buNone/>
             </a:pPr>
             <a:r>
@@ -5642,6 +5545,13 @@
             <a:prstDash val="solid"/>
           </a:ln>
         </p:spPr>
+        <p:txBody>
+          <a:bodyPr/>
+          <a:lstStyle/>
+          <a:p>
+            <a:endParaRPr lang="pt-BR"/>
+          </a:p>
+        </p:txBody>
       </p:sp>
       <p:sp>
         <p:nvSpPr>
@@ -5667,6 +5577,13 @@
             <a:prstDash val="solid"/>
           </a:ln>
         </p:spPr>
+        <p:txBody>
+          <a:bodyPr/>
+          <a:lstStyle/>
+          <a:p>
+            <a:endParaRPr lang="pt-BR"/>
+          </a:p>
+        </p:txBody>
       </p:sp>
       <p:sp>
         <p:nvSpPr>
@@ -5692,6 +5609,13 @@
             <a:prstDash val="solid"/>
           </a:ln>
         </p:spPr>
+        <p:txBody>
+          <a:bodyPr/>
+          <a:lstStyle/>
+          <a:p>
+            <a:endParaRPr lang="pt-BR"/>
+          </a:p>
+        </p:txBody>
       </p:sp>
       <p:sp>
         <p:nvSpPr>
@@ -5714,7 +5638,7 @@
           <a:bodyPr wrap="square" rtlCol="0" anchor="ctr"/>
           <a:lstStyle/>
           <a:p>
-            <a:pPr algn="ctr" indent="0" marL="0">
+            <a:pPr marL="0" indent="0" algn="ctr">
               <a:buNone/>
             </a:pPr>
             <a:r>
@@ -5750,7 +5674,7 @@
           <a:bodyPr wrap="square" rtlCol="0" anchor="ctr"/>
           <a:lstStyle/>
           <a:p>
-            <a:pPr indent="0" marL="0">
+            <a:pPr marL="0" indent="0">
               <a:buNone/>
             </a:pPr>
             <a:r>
@@ -5786,7 +5710,7 @@
           <a:bodyPr wrap="square" rtlCol="0" anchor="ctr"/>
           <a:lstStyle/>
           <a:p>
-            <a:pPr indent="0" marL="0">
+            <a:pPr marL="0" indent="0">
               <a:buNone/>
             </a:pPr>
             <a:r>
@@ -5825,6 +5749,13 @@
             <a:prstDash val="solid"/>
           </a:ln>
         </p:spPr>
+        <p:txBody>
+          <a:bodyPr/>
+          <a:lstStyle/>
+          <a:p>
+            <a:endParaRPr lang="pt-BR"/>
+          </a:p>
+        </p:txBody>
       </p:sp>
       <p:sp>
         <p:nvSpPr>
@@ -5847,7 +5778,7 @@
           <a:bodyPr wrap="square" rtlCol="0" anchor="ctr"/>
           <a:lstStyle/>
           <a:p>
-            <a:pPr algn="ctr" indent="0" marL="0">
+            <a:pPr marL="0" indent="0" algn="ctr">
               <a:buNone/>
             </a:pPr>
             <a:r>
@@ -5878,6 +5809,7 @@
         <a:solidFill>
           <a:srgbClr val="0D0D1A"/>
         </a:solidFill>
+        <a:effectLst/>
       </p:bgPr>
     </p:bg>
     <p:spTree>
@@ -5918,6 +5850,13 @@
             <a:prstDash val="solid"/>
           </a:ln>
         </p:spPr>
+        <p:txBody>
+          <a:bodyPr/>
+          <a:lstStyle/>
+          <a:p>
+            <a:endParaRPr lang="pt-BR"/>
+          </a:p>
+        </p:txBody>
       </p:sp>
       <p:sp>
         <p:nvSpPr>
@@ -5943,6 +5882,13 @@
             <a:prstDash val="solid"/>
           </a:ln>
         </p:spPr>
+        <p:txBody>
+          <a:bodyPr/>
+          <a:lstStyle/>
+          <a:p>
+            <a:endParaRPr lang="pt-BR"/>
+          </a:p>
+        </p:txBody>
       </p:sp>
       <p:sp>
         <p:nvSpPr>
@@ -5970,6 +5916,13 @@
             <a:prstDash val="solid"/>
           </a:ln>
         </p:spPr>
+        <p:txBody>
+          <a:bodyPr/>
+          <a:lstStyle/>
+          <a:p>
+            <a:endParaRPr lang="pt-BR"/>
+          </a:p>
+        </p:txBody>
       </p:sp>
       <p:sp>
         <p:nvSpPr>
@@ -5992,7 +5945,7 @@
           <a:bodyPr wrap="square" rtlCol="0" anchor="ctr"/>
           <a:lstStyle/>
           <a:p>
-            <a:pPr algn="ctr" indent="0" marL="0">
+            <a:pPr marL="0" indent="0" algn="ctr">
               <a:buNone/>
             </a:pPr>
             <a:r>
@@ -6028,7 +5981,7 @@
           <a:bodyPr wrap="square" rtlCol="0" anchor="ctr"/>
           <a:lstStyle/>
           <a:p>
-            <a:pPr algn="ctr" indent="0" marL="0">
+            <a:pPr marL="0" indent="0" algn="ctr">
               <a:buNone/>
             </a:pPr>
             <a:r>
@@ -6064,7 +6017,7 @@
           <a:bodyPr wrap="square" rtlCol="0" anchor="ctr"/>
           <a:lstStyle/>
           <a:p>
-            <a:pPr algn="ctr" indent="0" marL="0">
+            <a:pPr marL="0" indent="0" algn="ctr">
               <a:buNone/>
             </a:pPr>
             <a:r>
@@ -6103,6 +6056,13 @@
             <a:prstDash val="solid"/>
           </a:ln>
         </p:spPr>
+        <p:txBody>
+          <a:bodyPr/>
+          <a:lstStyle/>
+          <a:p>
+            <a:endParaRPr lang="pt-BR"/>
+          </a:p>
+        </p:txBody>
       </p:sp>
     </p:spTree>
   </p:cSld>
@@ -6405,4 +6365,319 @@
     </a:ext>
   </a:extLst>
 </a:theme>
+</file>
+
+<file path=ppt/theme/theme2.xml><?xml version="1.0" encoding="utf-8"?>
+<a:theme xmlns:a="http://schemas.openxmlformats.org/drawingml/2006/main" name="Tema do Office">
+  <a:themeElements>
+    <a:clrScheme name="Office">
+      <a:dk1>
+        <a:sysClr val="windowText" lastClr="000000"/>
+      </a:dk1>
+      <a:lt1>
+        <a:sysClr val="window" lastClr="FFFFFF"/>
+      </a:lt1>
+      <a:dk2>
+        <a:srgbClr val="0E2841"/>
+      </a:dk2>
+      <a:lt2>
+        <a:srgbClr val="E8E8E8"/>
+      </a:lt2>
+      <a:accent1>
+        <a:srgbClr val="156082"/>
+      </a:accent1>
+      <a:accent2>
+        <a:srgbClr val="E97132"/>
+      </a:accent2>
+      <a:accent3>
+        <a:srgbClr val="196B24"/>
+      </a:accent3>
+      <a:accent4>
+        <a:srgbClr val="0F9ED5"/>
+      </a:accent4>
+      <a:accent5>
+        <a:srgbClr val="A02B93"/>
+      </a:accent5>
+      <a:accent6>
+        <a:srgbClr val="4EA72E"/>
+      </a:accent6>
+      <a:hlink>
+        <a:srgbClr val="467886"/>
+      </a:hlink>
+      <a:folHlink>
+        <a:srgbClr val="96607D"/>
+      </a:folHlink>
+    </a:clrScheme>
+    <a:fontScheme name="Office">
+      <a:majorFont>
+        <a:latin typeface="Aptos Display" panose="02110004020202020204"/>
+        <a:ea typeface=""/>
+        <a:cs typeface=""/>
+        <a:font script="Jpan" typeface="游ゴシック Light"/>
+        <a:font script="Hang" typeface="맑은 고딕"/>
+        <a:font script="Hans" typeface="等线 Light"/>
+        <a:font script="Hant" typeface="新細明體"/>
+        <a:font script="Arab" typeface="Times New Roman"/>
+        <a:font script="Hebr" typeface="Times New Roman"/>
+        <a:font script="Thai" typeface="Angsana New"/>
+        <a:font script="Ethi" typeface="Nyala"/>
+        <a:font script="Beng" typeface="Vrinda"/>
+        <a:font script="Gujr" typeface="Shruti"/>
+        <a:font script="Khmr" typeface="MoolBoran"/>
+        <a:font script="Knda" typeface="Tunga"/>
+        <a:font script="Guru" typeface="Raavi"/>
+        <a:font script="Cans" typeface="Euphemia"/>
+        <a:font script="Cher" typeface="Plantagenet Cherokee"/>
+        <a:font script="Yiii" typeface="Microsoft Yi Baiti"/>
+        <a:font script="Tibt" typeface="Microsoft Himalaya"/>
+        <a:font script="Thaa" typeface="MV Boli"/>
+        <a:font script="Deva" typeface="Mangal"/>
+        <a:font script="Telu" typeface="Gautami"/>
+        <a:font script="Taml" typeface="Latha"/>
+        <a:font script="Syrc" typeface="Estrangelo Edessa"/>
+        <a:font script="Orya" typeface="Kalinga"/>
+        <a:font script="Mlym" typeface="Kartika"/>
+        <a:font script="Laoo" typeface="DokChampa"/>
+        <a:font script="Sinh" typeface="Iskoola Pota"/>
+        <a:font script="Mong" typeface="Mongolian Baiti"/>
+        <a:font script="Viet" typeface="Times New Roman"/>
+        <a:font script="Uigh" typeface="Microsoft Uighur"/>
+        <a:font script="Geor" typeface="Sylfaen"/>
+        <a:font script="Armn" typeface="Arial"/>
+        <a:font script="Bugi" typeface="Leelawadee UI"/>
+        <a:font script="Bopo" typeface="Microsoft JhengHei"/>
+        <a:font script="Java" typeface="Javanese Text"/>
+        <a:font script="Lisu" typeface="Segoe UI"/>
+        <a:font script="Mymr" typeface="Myanmar Text"/>
+        <a:font script="Nkoo" typeface="Ebrima"/>
+        <a:font script="Olck" typeface="Nirmala UI"/>
+        <a:font script="Osma" typeface="Ebrima"/>
+        <a:font script="Phag" typeface="Phagspa"/>
+        <a:font script="Syrn" typeface="Estrangelo Edessa"/>
+        <a:font script="Syrj" typeface="Estrangelo Edessa"/>
+        <a:font script="Syre" typeface="Estrangelo Edessa"/>
+        <a:font script="Sora" typeface="Nirmala UI"/>
+        <a:font script="Tale" typeface="Microsoft Tai Le"/>
+        <a:font script="Talu" typeface="Microsoft New Tai Lue"/>
+        <a:font script="Tfng" typeface="Ebrima"/>
+      </a:majorFont>
+      <a:minorFont>
+        <a:latin typeface="Aptos" panose="02110004020202020204"/>
+        <a:ea typeface=""/>
+        <a:cs typeface=""/>
+        <a:font script="Jpan" typeface="游ゴシック"/>
+        <a:font script="Hang" typeface="맑은 고딕"/>
+        <a:font script="Hans" typeface="等线"/>
+        <a:font script="Hant" typeface="新細明體"/>
+        <a:font script="Arab" typeface="Arial"/>
+        <a:font script="Hebr" typeface="Arial"/>
+        <a:font script="Thai" typeface="Cordia New"/>
+        <a:font script="Ethi" typeface="Nyala"/>
+        <a:font script="Beng" typeface="Vrinda"/>
+        <a:font script="Gujr" typeface="Shruti"/>
+        <a:font script="Khmr" typeface="DaunPenh"/>
+        <a:font script="Knda" typeface="Tunga"/>
+        <a:font script="Guru" typeface="Raavi"/>
+        <a:font script="Cans" typeface="Euphemia"/>
+        <a:font script="Cher" typeface="Plantagenet Cherokee"/>
+        <a:font script="Yiii" typeface="Microsoft Yi Baiti"/>
+        <a:font script="Tibt" typeface="Microsoft Himalaya"/>
+        <a:font script="Thaa" typeface="MV Boli"/>
+        <a:font script="Deva" typeface="Mangal"/>
+        <a:font script="Telu" typeface="Gautami"/>
+        <a:font script="Taml" typeface="Latha"/>
+        <a:font script="Syrc" typeface="Estrangelo Edessa"/>
+        <a:font script="Orya" typeface="Kalinga"/>
+        <a:font script="Mlym" typeface="Kartika"/>
+        <a:font script="Laoo" typeface="DokChampa"/>
+        <a:font script="Sinh" typeface="Iskoola Pota"/>
+        <a:font script="Mong" typeface="Mongolian Baiti"/>
+        <a:font script="Viet" typeface="Arial"/>
+        <a:font script="Uigh" typeface="Microsoft Uighur"/>
+        <a:font script="Geor" typeface="Sylfaen"/>
+        <a:font script="Armn" typeface="Arial"/>
+        <a:font script="Bugi" typeface="Leelawadee UI"/>
+        <a:font script="Bopo" typeface="Microsoft JhengHei"/>
+        <a:font script="Java" typeface="Javanese Text"/>
+        <a:font script="Lisu" typeface="Segoe UI"/>
+        <a:font script="Mymr" typeface="Myanmar Text"/>
+        <a:font script="Nkoo" typeface="Ebrima"/>
+        <a:font script="Olck" typeface="Nirmala UI"/>
+        <a:font script="Osma" typeface="Ebrima"/>
+        <a:font script="Phag" typeface="Phagspa"/>
+        <a:font script="Syrn" typeface="Estrangelo Edessa"/>
+        <a:font script="Syrj" typeface="Estrangelo Edessa"/>
+        <a:font script="Syre" typeface="Estrangelo Edessa"/>
+        <a:font script="Sora" typeface="Nirmala UI"/>
+        <a:font script="Tale" typeface="Microsoft Tai Le"/>
+        <a:font script="Talu" typeface="Microsoft New Tai Lue"/>
+        <a:font script="Tfng" typeface="Ebrima"/>
+      </a:minorFont>
+    </a:fontScheme>
+    <a:fmtScheme name="Office">
+      <a:fillStyleLst>
+        <a:solidFill>
+          <a:schemeClr val="phClr"/>
+        </a:solidFill>
+        <a:gradFill rotWithShape="1">
+          <a:gsLst>
+            <a:gs pos="0">
+              <a:schemeClr val="phClr">
+                <a:lumMod val="110000"/>
+                <a:satMod val="105000"/>
+                <a:tint val="67000"/>
+              </a:schemeClr>
+            </a:gs>
+            <a:gs pos="50000">
+              <a:schemeClr val="phClr">
+                <a:lumMod val="105000"/>
+                <a:satMod val="103000"/>
+                <a:tint val="73000"/>
+              </a:schemeClr>
+            </a:gs>
+            <a:gs pos="100000">
+              <a:schemeClr val="phClr">
+                <a:lumMod val="105000"/>
+                <a:satMod val="109000"/>
+                <a:tint val="81000"/>
+              </a:schemeClr>
+            </a:gs>
+          </a:gsLst>
+          <a:lin ang="5400000" scaled="0"/>
+        </a:gradFill>
+        <a:gradFill rotWithShape="1">
+          <a:gsLst>
+            <a:gs pos="0">
+              <a:schemeClr val="phClr">
+                <a:satMod val="103000"/>
+                <a:lumMod val="102000"/>
+                <a:tint val="94000"/>
+              </a:schemeClr>
+            </a:gs>
+            <a:gs pos="50000">
+              <a:schemeClr val="phClr">
+                <a:satMod val="110000"/>
+                <a:lumMod val="100000"/>
+                <a:shade val="100000"/>
+              </a:schemeClr>
+            </a:gs>
+            <a:gs pos="100000">
+              <a:schemeClr val="phClr">
+                <a:lumMod val="99000"/>
+                <a:satMod val="120000"/>
+                <a:shade val="78000"/>
+              </a:schemeClr>
+            </a:gs>
+          </a:gsLst>
+          <a:lin ang="5400000" scaled="0"/>
+        </a:gradFill>
+      </a:fillStyleLst>
+      <a:lnStyleLst>
+        <a:ln w="12700" cap="flat" cmpd="sng" algn="ctr">
+          <a:solidFill>
+            <a:schemeClr val="phClr"/>
+          </a:solidFill>
+          <a:prstDash val="solid"/>
+          <a:miter lim="800000"/>
+        </a:ln>
+        <a:ln w="19050" cap="flat" cmpd="sng" algn="ctr">
+          <a:solidFill>
+            <a:schemeClr val="phClr"/>
+          </a:solidFill>
+          <a:prstDash val="solid"/>
+          <a:miter lim="800000"/>
+        </a:ln>
+        <a:ln w="25400" cap="flat" cmpd="sng" algn="ctr">
+          <a:solidFill>
+            <a:schemeClr val="phClr"/>
+          </a:solidFill>
+          <a:prstDash val="solid"/>
+          <a:miter lim="800000"/>
+        </a:ln>
+      </a:lnStyleLst>
+      <a:effectStyleLst>
+        <a:effectStyle>
+          <a:effectLst/>
+        </a:effectStyle>
+        <a:effectStyle>
+          <a:effectLst/>
+        </a:effectStyle>
+        <a:effectStyle>
+          <a:effectLst>
+            <a:outerShdw blurRad="57150" dist="19050" dir="5400000" algn="ctr" rotWithShape="0">
+              <a:srgbClr val="000000">
+                <a:alpha val="63000"/>
+              </a:srgbClr>
+            </a:outerShdw>
+          </a:effectLst>
+        </a:effectStyle>
+      </a:effectStyleLst>
+      <a:bgFillStyleLst>
+        <a:solidFill>
+          <a:schemeClr val="phClr"/>
+        </a:solidFill>
+        <a:solidFill>
+          <a:schemeClr val="phClr">
+            <a:tint val="95000"/>
+            <a:satMod val="170000"/>
+          </a:schemeClr>
+        </a:solidFill>
+        <a:gradFill rotWithShape="1">
+          <a:gsLst>
+            <a:gs pos="0">
+              <a:schemeClr val="phClr">
+                <a:tint val="93000"/>
+                <a:satMod val="150000"/>
+                <a:shade val="98000"/>
+                <a:lumMod val="102000"/>
+              </a:schemeClr>
+            </a:gs>
+            <a:gs pos="50000">
+              <a:schemeClr val="phClr">
+                <a:tint val="98000"/>
+                <a:satMod val="130000"/>
+                <a:shade val="90000"/>
+                <a:lumMod val="103000"/>
+              </a:schemeClr>
+            </a:gs>
+            <a:gs pos="100000">
+              <a:schemeClr val="phClr">
+                <a:shade val="63000"/>
+                <a:satMod val="120000"/>
+              </a:schemeClr>
+            </a:gs>
+          </a:gsLst>
+          <a:lin ang="5400000" scaled="0"/>
+        </a:gradFill>
+      </a:bgFillStyleLst>
+    </a:fmtScheme>
+  </a:themeElements>
+  <a:objectDefaults>
+    <a:lnDef>
+      <a:spPr/>
+      <a:bodyPr/>
+      <a:lstStyle/>
+      <a:style>
+        <a:lnRef idx="2">
+          <a:schemeClr val="accent1"/>
+        </a:lnRef>
+        <a:fillRef idx="0">
+          <a:schemeClr val="accent1"/>
+        </a:fillRef>
+        <a:effectRef idx="1">
+          <a:schemeClr val="accent1"/>
+        </a:effectRef>
+        <a:fontRef idx="minor">
+          <a:schemeClr val="tx1"/>
+        </a:fontRef>
+      </a:style>
+    </a:lnDef>
+  </a:objectDefaults>
+  <a:extraClrSchemeLst/>
+  <a:extLst>
+    <a:ext uri="{05A4C25C-085E-4340-85A3-A5531E510DB2}">
+      <thm15:themeFamily xmlns:thm15="http://schemas.microsoft.com/office/thememl/2012/main" name="Office Theme" id="{2E142A2C-CD16-42D6-873A-C26D2A0506FA}" vid="{1BDDFF52-6CD6-40A5-AB3C-68EB2F1E4D0A}"/>
+    </a:ext>
+  </a:extLst>
+</a:theme>
 </file>